--- a/연구자료/260424_Linear_Logistic_Regression.pptx
+++ b/연구자료/260424_Linear_Logistic_Regression.pptx
@@ -17,11 +17,11 @@
     <p:sldId id="352" r:id="rId8"/>
     <p:sldId id="354" r:id="rId9"/>
     <p:sldId id="383" r:id="rId10"/>
-    <p:sldId id="404" r:id="rId11"/>
-    <p:sldId id="403" r:id="rId12"/>
+    <p:sldId id="403" r:id="rId11"/>
+    <p:sldId id="404" r:id="rId12"/>
     <p:sldId id="424" r:id="rId13"/>
-    <p:sldId id="426" r:id="rId14"/>
-    <p:sldId id="425" r:id="rId15"/>
+    <p:sldId id="425" r:id="rId14"/>
+    <p:sldId id="426" r:id="rId15"/>
     <p:sldId id="369" r:id="rId16"/>
     <p:sldId id="355" r:id="rId17"/>
     <p:sldId id="417" r:id="rId18"/>
@@ -53,11 +53,11 @@
   <p:notesSz cx="6858000" cy="9144000"/>
   <p:embeddedFontLst>
     <p:embeddedFont>
-      <p:font typeface="KoPubWorld돋움체 Bold" panose="020B0600000101010101" charset="-127"/>
+      <p:font typeface="KoPubWorld돋움체 Bold" panose="00000800000000000000" pitchFamily="2" charset="-127"/>
       <p:bold r:id="rId43"/>
     </p:embeddedFont>
     <p:embeddedFont>
-      <p:font typeface="KoPubWorld돋움체 Medium" panose="020B0600000101010101" charset="-127"/>
+      <p:font typeface="KoPubWorld돋움체 Medium" panose="00000600000000000000" pitchFamily="2" charset="-127"/>
       <p:regular r:id="rId44"/>
     </p:embeddedFont>
     <p:embeddedFont>
@@ -183,11 +183,11 @@
             <p14:sldId id="352"/>
             <p14:sldId id="354"/>
             <p14:sldId id="383"/>
+            <p14:sldId id="403"/>
             <p14:sldId id="404"/>
-            <p14:sldId id="403"/>
             <p14:sldId id="424"/>
+            <p14:sldId id="425"/>
             <p14:sldId id="426"/>
-            <p14:sldId id="425"/>
             <p14:sldId id="369"/>
             <p14:sldId id="355"/>
             <p14:sldId id="417"/>
@@ -247,6 +247,87 @@
 
 <file path=ppt/changesInfos/changesInfo1.xml><?xml version="1.0" encoding="utf-8"?>
 <pc:chgInfo xmlns:a="http://schemas.openxmlformats.org/drawingml/2006/main" xmlns:r="http://schemas.openxmlformats.org/officeDocument/2006/relationships" xmlns:ac="http://schemas.microsoft.com/office/drawing/2013/main/command" xmlns:pc="http://schemas.microsoft.com/office/powerpoint/2013/main/command">
+  <pc:docChgLst>
+    <pc:chgData name="Jihun Kim" userId="2469e03939fca47a" providerId="LiveId" clId="{0EC0481E-6524-4E60-9AD2-E07F55D3906F}"/>
+    <pc:docChg chg="undo custSel modSld modMainMaster">
+      <pc:chgData name="Jihun Kim" userId="2469e03939fca47a" providerId="LiveId" clId="{0EC0481E-6524-4E60-9AD2-E07F55D3906F}" dt="2026-04-09T12:43:38.717" v="9" actId="113"/>
+      <pc:docMkLst>
+        <pc:docMk/>
+      </pc:docMkLst>
+      <pc:sldChg chg="modSp mod">
+        <pc:chgData name="Jihun Kim" userId="2469e03939fca47a" providerId="LiveId" clId="{0EC0481E-6524-4E60-9AD2-E07F55D3906F}" dt="2026-04-09T12:43:04.015" v="5" actId="2711"/>
+        <pc:sldMkLst>
+          <pc:docMk/>
+          <pc:sldMk cId="1998851532" sldId="256"/>
+        </pc:sldMkLst>
+        <pc:spChg chg="mod">
+          <ac:chgData name="Jihun Kim" userId="2469e03939fca47a" providerId="LiveId" clId="{0EC0481E-6524-4E60-9AD2-E07F55D3906F}" dt="2026-04-09T12:41:51.143" v="2" actId="207"/>
+          <ac:spMkLst>
+            <pc:docMk/>
+            <pc:sldMk cId="1998851532" sldId="256"/>
+            <ac:spMk id="4" creationId="{4C14D9A0-1BB9-428F-B273-3CE24758593B}"/>
+          </ac:spMkLst>
+        </pc:spChg>
+        <pc:spChg chg="mod">
+          <ac:chgData name="Jihun Kim" userId="2469e03939fca47a" providerId="LiveId" clId="{0EC0481E-6524-4E60-9AD2-E07F55D3906F}" dt="2026-04-09T12:42:23.172" v="3" actId="2711"/>
+          <ac:spMkLst>
+            <pc:docMk/>
+            <pc:sldMk cId="1998851532" sldId="256"/>
+            <ac:spMk id="5" creationId="{94B21C1C-F3A0-440B-961E-968F2C77FB2A}"/>
+          </ac:spMkLst>
+        </pc:spChg>
+        <pc:spChg chg="mod">
+          <ac:chgData name="Jihun Kim" userId="2469e03939fca47a" providerId="LiveId" clId="{0EC0481E-6524-4E60-9AD2-E07F55D3906F}" dt="2026-04-09T12:42:57.903" v="4" actId="2711"/>
+          <ac:spMkLst>
+            <pc:docMk/>
+            <pc:sldMk cId="1998851532" sldId="256"/>
+            <ac:spMk id="6" creationId="{63F70F93-076B-4BBC-B933-AC7768BB0AE5}"/>
+          </ac:spMkLst>
+        </pc:spChg>
+        <pc:spChg chg="mod">
+          <ac:chgData name="Jihun Kim" userId="2469e03939fca47a" providerId="LiveId" clId="{0EC0481E-6524-4E60-9AD2-E07F55D3906F}" dt="2026-04-09T12:43:04.015" v="5" actId="2711"/>
+          <ac:spMkLst>
+            <pc:docMk/>
+            <pc:sldMk cId="1998851532" sldId="256"/>
+            <ac:spMk id="7" creationId="{CEB5E8A0-083F-4B6E-AA66-93BFFD6A8E1A}"/>
+          </ac:spMkLst>
+        </pc:spChg>
+      </pc:sldChg>
+      <pc:sldMasterChg chg="modSldLayout">
+        <pc:chgData name="Jihun Kim" userId="2469e03939fca47a" providerId="LiveId" clId="{0EC0481E-6524-4E60-9AD2-E07F55D3906F}" dt="2026-04-09T12:43:38.717" v="9" actId="113"/>
+        <pc:sldMasterMkLst>
+          <pc:docMk/>
+          <pc:sldMasterMk cId="2755485914" sldId="2147483648"/>
+        </pc:sldMasterMkLst>
+        <pc:sldLayoutChg chg="modSp mod">
+          <pc:chgData name="Jihun Kim" userId="2469e03939fca47a" providerId="LiveId" clId="{0EC0481E-6524-4E60-9AD2-E07F55D3906F}" dt="2026-04-09T12:43:38.717" v="9" actId="113"/>
+          <pc:sldLayoutMkLst>
+            <pc:docMk/>
+            <pc:sldMasterMk cId="2755485914" sldId="2147483648"/>
+            <pc:sldLayoutMk cId="3176484067" sldId="2147483650"/>
+          </pc:sldLayoutMkLst>
+          <pc:spChg chg="mod">
+            <ac:chgData name="Jihun Kim" userId="2469e03939fca47a" providerId="LiveId" clId="{0EC0481E-6524-4E60-9AD2-E07F55D3906F}" dt="2026-04-09T12:43:24.420" v="6" actId="2711"/>
+            <ac:spMkLst>
+              <pc:docMk/>
+              <pc:sldMasterMk cId="2755485914" sldId="2147483648"/>
+              <pc:sldLayoutMk cId="3176484067" sldId="2147483650"/>
+              <ac:spMk id="2" creationId="{FE4F955D-C3E9-4033-8442-9095377B0662}"/>
+            </ac:spMkLst>
+          </pc:spChg>
+          <pc:spChg chg="mod">
+            <ac:chgData name="Jihun Kim" userId="2469e03939fca47a" providerId="LiveId" clId="{0EC0481E-6524-4E60-9AD2-E07F55D3906F}" dt="2026-04-09T12:43:38.717" v="9" actId="113"/>
+            <ac:spMkLst>
+              <pc:docMk/>
+              <pc:sldMasterMk cId="2755485914" sldId="2147483648"/>
+              <pc:sldLayoutMk cId="3176484067" sldId="2147483650"/>
+              <ac:spMk id="3" creationId="{9CA482F1-FC12-443E-892A-B48F9C50AA53}"/>
+            </ac:spMkLst>
+          </pc:spChg>
+        </pc:sldLayoutChg>
+      </pc:sldMasterChg>
+    </pc:docChg>
+  </pc:docChgLst>
   <pc:docChgLst>
     <pc:chgData name="janghoon jun" userId="056a5883350c2f5e" providerId="LiveId" clId="{74AFAB52-6487-4651-9B79-2F181DBD8D0A}"/>
     <pc:docChg chg="addSld delSld modSld sldOrd">
@@ -1271,87 +1352,6 @@
       </pc:sldChg>
     </pc:docChg>
   </pc:docChgLst>
-  <pc:docChgLst>
-    <pc:chgData name="Jihun Kim" userId="2469e03939fca47a" providerId="LiveId" clId="{0EC0481E-6524-4E60-9AD2-E07F55D3906F}"/>
-    <pc:docChg chg="undo custSel modSld modMainMaster">
-      <pc:chgData name="Jihun Kim" userId="2469e03939fca47a" providerId="LiveId" clId="{0EC0481E-6524-4E60-9AD2-E07F55D3906F}" dt="2026-04-09T12:43:38.717" v="9" actId="113"/>
-      <pc:docMkLst>
-        <pc:docMk/>
-      </pc:docMkLst>
-      <pc:sldChg chg="modSp mod">
-        <pc:chgData name="Jihun Kim" userId="2469e03939fca47a" providerId="LiveId" clId="{0EC0481E-6524-4E60-9AD2-E07F55D3906F}" dt="2026-04-09T12:43:04.015" v="5" actId="2711"/>
-        <pc:sldMkLst>
-          <pc:docMk/>
-          <pc:sldMk cId="1998851532" sldId="256"/>
-        </pc:sldMkLst>
-        <pc:spChg chg="mod">
-          <ac:chgData name="Jihun Kim" userId="2469e03939fca47a" providerId="LiveId" clId="{0EC0481E-6524-4E60-9AD2-E07F55D3906F}" dt="2026-04-09T12:41:51.143" v="2" actId="207"/>
-          <ac:spMkLst>
-            <pc:docMk/>
-            <pc:sldMk cId="1998851532" sldId="256"/>
-            <ac:spMk id="4" creationId="{4C14D9A0-1BB9-428F-B273-3CE24758593B}"/>
-          </ac:spMkLst>
-        </pc:spChg>
-        <pc:spChg chg="mod">
-          <ac:chgData name="Jihun Kim" userId="2469e03939fca47a" providerId="LiveId" clId="{0EC0481E-6524-4E60-9AD2-E07F55D3906F}" dt="2026-04-09T12:42:23.172" v="3" actId="2711"/>
-          <ac:spMkLst>
-            <pc:docMk/>
-            <pc:sldMk cId="1998851532" sldId="256"/>
-            <ac:spMk id="5" creationId="{94B21C1C-F3A0-440B-961E-968F2C77FB2A}"/>
-          </ac:spMkLst>
-        </pc:spChg>
-        <pc:spChg chg="mod">
-          <ac:chgData name="Jihun Kim" userId="2469e03939fca47a" providerId="LiveId" clId="{0EC0481E-6524-4E60-9AD2-E07F55D3906F}" dt="2026-04-09T12:42:57.903" v="4" actId="2711"/>
-          <ac:spMkLst>
-            <pc:docMk/>
-            <pc:sldMk cId="1998851532" sldId="256"/>
-            <ac:spMk id="6" creationId="{63F70F93-076B-4BBC-B933-AC7768BB0AE5}"/>
-          </ac:spMkLst>
-        </pc:spChg>
-        <pc:spChg chg="mod">
-          <ac:chgData name="Jihun Kim" userId="2469e03939fca47a" providerId="LiveId" clId="{0EC0481E-6524-4E60-9AD2-E07F55D3906F}" dt="2026-04-09T12:43:04.015" v="5" actId="2711"/>
-          <ac:spMkLst>
-            <pc:docMk/>
-            <pc:sldMk cId="1998851532" sldId="256"/>
-            <ac:spMk id="7" creationId="{CEB5E8A0-083F-4B6E-AA66-93BFFD6A8E1A}"/>
-          </ac:spMkLst>
-        </pc:spChg>
-      </pc:sldChg>
-      <pc:sldMasterChg chg="modSldLayout">
-        <pc:chgData name="Jihun Kim" userId="2469e03939fca47a" providerId="LiveId" clId="{0EC0481E-6524-4E60-9AD2-E07F55D3906F}" dt="2026-04-09T12:43:38.717" v="9" actId="113"/>
-        <pc:sldMasterMkLst>
-          <pc:docMk/>
-          <pc:sldMasterMk cId="2755485914" sldId="2147483648"/>
-        </pc:sldMasterMkLst>
-        <pc:sldLayoutChg chg="modSp mod">
-          <pc:chgData name="Jihun Kim" userId="2469e03939fca47a" providerId="LiveId" clId="{0EC0481E-6524-4E60-9AD2-E07F55D3906F}" dt="2026-04-09T12:43:38.717" v="9" actId="113"/>
-          <pc:sldLayoutMkLst>
-            <pc:docMk/>
-            <pc:sldMasterMk cId="2755485914" sldId="2147483648"/>
-            <pc:sldLayoutMk cId="3176484067" sldId="2147483650"/>
-          </pc:sldLayoutMkLst>
-          <pc:spChg chg="mod">
-            <ac:chgData name="Jihun Kim" userId="2469e03939fca47a" providerId="LiveId" clId="{0EC0481E-6524-4E60-9AD2-E07F55D3906F}" dt="2026-04-09T12:43:24.420" v="6" actId="2711"/>
-            <ac:spMkLst>
-              <pc:docMk/>
-              <pc:sldMasterMk cId="2755485914" sldId="2147483648"/>
-              <pc:sldLayoutMk cId="3176484067" sldId="2147483650"/>
-              <ac:spMk id="2" creationId="{FE4F955D-C3E9-4033-8442-9095377B0662}"/>
-            </ac:spMkLst>
-          </pc:spChg>
-          <pc:spChg chg="mod">
-            <ac:chgData name="Jihun Kim" userId="2469e03939fca47a" providerId="LiveId" clId="{0EC0481E-6524-4E60-9AD2-E07F55D3906F}" dt="2026-04-09T12:43:38.717" v="9" actId="113"/>
-            <ac:spMkLst>
-              <pc:docMk/>
-              <pc:sldMasterMk cId="2755485914" sldId="2147483648"/>
-              <pc:sldLayoutMk cId="3176484067" sldId="2147483650"/>
-              <ac:spMk id="3" creationId="{9CA482F1-FC12-443E-892A-B48F9C50AA53}"/>
-            </ac:spMkLst>
-          </pc:spChg>
-        </pc:sldLayoutChg>
-      </pc:sldMasterChg>
-    </pc:docChg>
-  </pc:docChgLst>
 </pc:chgInfo>
 </file>
 
@@ -1453,7 +1453,7 @@
           <a:p>
             <a:fld id="{33074436-1BEA-4F09-AD5C-9DF87C96BF5A}" type="datetimeFigureOut">
               <a:rPr lang="ko-KR" altLang="en-US" smtClean="0"/>
-              <a:t>2026-04-23</a:t>
+              <a:t>2026-04-24</a:t>
             </a:fld>
             <a:endParaRPr lang="ko-KR" altLang="en-US"/>
           </a:p>
@@ -1878,7 +1878,7 @@
     </p:spTree>
     <p:extLst>
       <p:ext uri="{BB962C8B-B14F-4D97-AF65-F5344CB8AC3E}">
-        <p14:creationId xmlns:p14="http://schemas.microsoft.com/office/powerpoint/2010/main" val="1539512188"/>
+        <p14:creationId xmlns:p14="http://schemas.microsoft.com/office/powerpoint/2010/main" val="2388830836"/>
       </p:ext>
     </p:extLst>
   </p:cSld>
@@ -2004,6 +2004,114 @@
         <p:cNvPr id="1" name="">
           <a:extLst>
             <a:ext uri="{FF2B5EF4-FFF2-40B4-BE49-F238E27FC236}">
+              <a16:creationId xmlns:a16="http://schemas.microsoft.com/office/drawing/2014/main" id="{F2DC3EA7-A598-8F5D-837D-6EC551DCD991}"/>
+            </a:ext>
+          </a:extLst>
+        </p:cNvPr>
+        <p:cNvGrpSpPr/>
+        <p:nvPr/>
+      </p:nvGrpSpPr>
+      <p:grpSpPr>
+        <a:xfrm>
+          <a:off x="0" y="0"/>
+          <a:ext cx="0" cy="0"/>
+          <a:chOff x="0" y="0"/>
+          <a:chExt cx="0" cy="0"/>
+        </a:xfrm>
+      </p:grpSpPr>
+      <p:sp>
+        <p:nvSpPr>
+          <p:cNvPr id="2" name="슬라이드 이미지 개체 틀 1">
+            <a:extLst>
+              <a:ext uri="{FF2B5EF4-FFF2-40B4-BE49-F238E27FC236}">
+                <a16:creationId xmlns:a16="http://schemas.microsoft.com/office/drawing/2014/main" id="{CC4D1BA7-9B98-21D1-222D-EC65DE89B833}"/>
+              </a:ext>
+            </a:extLst>
+          </p:cNvPr>
+          <p:cNvSpPr>
+            <a:spLocks noGrp="1" noRot="1" noChangeAspect="1"/>
+          </p:cNvSpPr>
+          <p:nvPr>
+            <p:ph type="sldImg"/>
+          </p:nvPr>
+        </p:nvSpPr>
+        <p:spPr/>
+      </p:sp>
+      <p:sp>
+        <p:nvSpPr>
+          <p:cNvPr id="3" name="슬라이드 노트 개체 틀 2">
+            <a:extLst>
+              <a:ext uri="{FF2B5EF4-FFF2-40B4-BE49-F238E27FC236}">
+                <a16:creationId xmlns:a16="http://schemas.microsoft.com/office/drawing/2014/main" id="{EBFFCE0E-4C46-6EC2-916D-7984E0CF1779}"/>
+              </a:ext>
+            </a:extLst>
+          </p:cNvPr>
+          <p:cNvSpPr>
+            <a:spLocks noGrp="1"/>
+          </p:cNvSpPr>
+          <p:nvPr>
+            <p:ph type="body" idx="1"/>
+          </p:nvPr>
+        </p:nvSpPr>
+        <p:spPr/>
+        <p:txBody>
+          <a:bodyPr/>
+          <a:lstStyle/>
+          <a:p>
+            <a:endParaRPr lang="en-US" altLang="ko-KR" dirty="0"/>
+          </a:p>
+        </p:txBody>
+      </p:sp>
+      <p:sp>
+        <p:nvSpPr>
+          <p:cNvPr id="4" name="슬라이드 번호 개체 틀 3">
+            <a:extLst>
+              <a:ext uri="{FF2B5EF4-FFF2-40B4-BE49-F238E27FC236}">
+                <a16:creationId xmlns:a16="http://schemas.microsoft.com/office/drawing/2014/main" id="{327C60D6-CA25-C30C-20FD-4750FEF05196}"/>
+              </a:ext>
+            </a:extLst>
+          </p:cNvPr>
+          <p:cNvSpPr>
+            <a:spLocks noGrp="1"/>
+          </p:cNvSpPr>
+          <p:nvPr>
+            <p:ph type="sldNum" sz="quarter" idx="5"/>
+          </p:nvPr>
+        </p:nvSpPr>
+        <p:spPr/>
+        <p:txBody>
+          <a:bodyPr/>
+          <a:lstStyle/>
+          <a:p>
+            <a:fld id="{433C9518-700F-4811-95BB-24DAF3FA92F2}" type="slidenum">
+              <a:rPr lang="ko-KR" altLang="en-US" smtClean="0"/>
+              <a:t>13</a:t>
+            </a:fld>
+            <a:endParaRPr lang="ko-KR" altLang="en-US"/>
+          </a:p>
+        </p:txBody>
+      </p:sp>
+    </p:spTree>
+    <p:extLst>
+      <p:ext uri="{BB962C8B-B14F-4D97-AF65-F5344CB8AC3E}">
+        <p14:creationId xmlns:p14="http://schemas.microsoft.com/office/powerpoint/2010/main" val="1014232482"/>
+      </p:ext>
+    </p:extLst>
+  </p:cSld>
+  <p:clrMapOvr>
+    <a:masterClrMapping/>
+  </p:clrMapOvr>
+</p:notes>
+</file>
+
+<file path=ppt/notesSlides/notesSlide13.xml><?xml version="1.0" encoding="utf-8"?>
+<p:notes xmlns:a="http://schemas.openxmlformats.org/drawingml/2006/main" xmlns:r="http://schemas.openxmlformats.org/officeDocument/2006/relationships" xmlns:p="http://schemas.openxmlformats.org/presentationml/2006/main">
+  <p:cSld>
+    <p:spTree>
+      <p:nvGrpSpPr>
+        <p:cNvPr id="1" name="">
+          <a:extLst>
+            <a:ext uri="{FF2B5EF4-FFF2-40B4-BE49-F238E27FC236}">
               <a16:creationId xmlns:a16="http://schemas.microsoft.com/office/drawing/2014/main" id="{80B70686-E559-A47E-16BB-A9B20FBB1987}"/>
             </a:ext>
           </a:extLst>
@@ -2085,7 +2193,7 @@
           <a:p>
             <a:fld id="{433C9518-700F-4811-95BB-24DAF3FA92F2}" type="slidenum">
               <a:rPr lang="ko-KR" altLang="en-US" smtClean="0"/>
-              <a:t>13</a:t>
+              <a:t>14</a:t>
             </a:fld>
             <a:endParaRPr lang="ko-KR" altLang="en-US"/>
           </a:p>
@@ -2095,114 +2203,6 @@
     <p:extLst>
       <p:ext uri="{BB962C8B-B14F-4D97-AF65-F5344CB8AC3E}">
         <p14:creationId xmlns:p14="http://schemas.microsoft.com/office/powerpoint/2010/main" val="1348635711"/>
-      </p:ext>
-    </p:extLst>
-  </p:cSld>
-  <p:clrMapOvr>
-    <a:masterClrMapping/>
-  </p:clrMapOvr>
-</p:notes>
-</file>
-
-<file path=ppt/notesSlides/notesSlide13.xml><?xml version="1.0" encoding="utf-8"?>
-<p:notes xmlns:a="http://schemas.openxmlformats.org/drawingml/2006/main" xmlns:r="http://schemas.openxmlformats.org/officeDocument/2006/relationships" xmlns:p="http://schemas.openxmlformats.org/presentationml/2006/main">
-  <p:cSld>
-    <p:spTree>
-      <p:nvGrpSpPr>
-        <p:cNvPr id="1" name="">
-          <a:extLst>
-            <a:ext uri="{FF2B5EF4-FFF2-40B4-BE49-F238E27FC236}">
-              <a16:creationId xmlns:a16="http://schemas.microsoft.com/office/drawing/2014/main" id="{F2DC3EA7-A598-8F5D-837D-6EC551DCD991}"/>
-            </a:ext>
-          </a:extLst>
-        </p:cNvPr>
-        <p:cNvGrpSpPr/>
-        <p:nvPr/>
-      </p:nvGrpSpPr>
-      <p:grpSpPr>
-        <a:xfrm>
-          <a:off x="0" y="0"/>
-          <a:ext cx="0" cy="0"/>
-          <a:chOff x="0" y="0"/>
-          <a:chExt cx="0" cy="0"/>
-        </a:xfrm>
-      </p:grpSpPr>
-      <p:sp>
-        <p:nvSpPr>
-          <p:cNvPr id="2" name="슬라이드 이미지 개체 틀 1">
-            <a:extLst>
-              <a:ext uri="{FF2B5EF4-FFF2-40B4-BE49-F238E27FC236}">
-                <a16:creationId xmlns:a16="http://schemas.microsoft.com/office/drawing/2014/main" id="{CC4D1BA7-9B98-21D1-222D-EC65DE89B833}"/>
-              </a:ext>
-            </a:extLst>
-          </p:cNvPr>
-          <p:cNvSpPr>
-            <a:spLocks noGrp="1" noRot="1" noChangeAspect="1"/>
-          </p:cNvSpPr>
-          <p:nvPr>
-            <p:ph type="sldImg"/>
-          </p:nvPr>
-        </p:nvSpPr>
-        <p:spPr/>
-      </p:sp>
-      <p:sp>
-        <p:nvSpPr>
-          <p:cNvPr id="3" name="슬라이드 노트 개체 틀 2">
-            <a:extLst>
-              <a:ext uri="{FF2B5EF4-FFF2-40B4-BE49-F238E27FC236}">
-                <a16:creationId xmlns:a16="http://schemas.microsoft.com/office/drawing/2014/main" id="{EBFFCE0E-4C46-6EC2-916D-7984E0CF1779}"/>
-              </a:ext>
-            </a:extLst>
-          </p:cNvPr>
-          <p:cNvSpPr>
-            <a:spLocks noGrp="1"/>
-          </p:cNvSpPr>
-          <p:nvPr>
-            <p:ph type="body" idx="1"/>
-          </p:nvPr>
-        </p:nvSpPr>
-        <p:spPr/>
-        <p:txBody>
-          <a:bodyPr/>
-          <a:lstStyle/>
-          <a:p>
-            <a:endParaRPr lang="en-US" altLang="ko-KR" dirty="0"/>
-          </a:p>
-        </p:txBody>
-      </p:sp>
-      <p:sp>
-        <p:nvSpPr>
-          <p:cNvPr id="4" name="슬라이드 번호 개체 틀 3">
-            <a:extLst>
-              <a:ext uri="{FF2B5EF4-FFF2-40B4-BE49-F238E27FC236}">
-                <a16:creationId xmlns:a16="http://schemas.microsoft.com/office/drawing/2014/main" id="{327C60D6-CA25-C30C-20FD-4750FEF05196}"/>
-              </a:ext>
-            </a:extLst>
-          </p:cNvPr>
-          <p:cNvSpPr>
-            <a:spLocks noGrp="1"/>
-          </p:cNvSpPr>
-          <p:nvPr>
-            <p:ph type="sldNum" sz="quarter" idx="5"/>
-          </p:nvPr>
-        </p:nvSpPr>
-        <p:spPr/>
-        <p:txBody>
-          <a:bodyPr/>
-          <a:lstStyle/>
-          <a:p>
-            <a:fld id="{433C9518-700F-4811-95BB-24DAF3FA92F2}" type="slidenum">
-              <a:rPr lang="ko-KR" altLang="en-US" smtClean="0"/>
-              <a:t>14</a:t>
-            </a:fld>
-            <a:endParaRPr lang="ko-KR" altLang="en-US"/>
-          </a:p>
-        </p:txBody>
-      </p:sp>
-    </p:spTree>
-    <p:extLst>
-      <p:ext uri="{BB962C8B-B14F-4D97-AF65-F5344CB8AC3E}">
-        <p14:creationId xmlns:p14="http://schemas.microsoft.com/office/powerpoint/2010/main" val="1014232482"/>
       </p:ext>
     </p:extLst>
   </p:cSld>
@@ -5317,7 +5317,7 @@
     </p:spTree>
     <p:extLst>
       <p:ext uri="{BB962C8B-B14F-4D97-AF65-F5344CB8AC3E}">
-        <p14:creationId xmlns:p14="http://schemas.microsoft.com/office/powerpoint/2010/main" val="2388830836"/>
+        <p14:creationId xmlns:p14="http://schemas.microsoft.com/office/powerpoint/2010/main" val="1539512188"/>
       </p:ext>
     </p:extLst>
   </p:cSld>
@@ -9096,6 +9096,213 @@
           <a:chExt cx="0" cy="0"/>
         </a:xfrm>
       </p:grpSpPr>
+      <p:sp>
+        <p:nvSpPr>
+          <p:cNvPr id="2" name="제목 1">
+            <a:extLst>
+              <a:ext uri="{FF2B5EF4-FFF2-40B4-BE49-F238E27FC236}">
+                <a16:creationId xmlns:a16="http://schemas.microsoft.com/office/drawing/2014/main" id="{9AF0C8C8-C4B1-4336-9468-E6803A595282}"/>
+              </a:ext>
+            </a:extLst>
+          </p:cNvPr>
+          <p:cNvSpPr>
+            <a:spLocks noGrp="1"/>
+          </p:cNvSpPr>
+          <p:nvPr>
+            <p:ph type="title"/>
+          </p:nvPr>
+        </p:nvSpPr>
+        <p:spPr/>
+        <p:txBody>
+          <a:bodyPr/>
+          <a:lstStyle/>
+          <a:p>
+            <a:r>
+              <a:rPr lang="en-US" altLang="ko-KR" dirty="0"/>
+              <a:t>3. Detailed progress</a:t>
+            </a:r>
+            <a:endParaRPr lang="ko-KR" altLang="en-US" dirty="0"/>
+          </a:p>
+        </p:txBody>
+      </p:sp>
+      <p:sp>
+        <p:nvSpPr>
+          <p:cNvPr id="4" name="슬라이드 번호 개체 틀 3">
+            <a:extLst>
+              <a:ext uri="{FF2B5EF4-FFF2-40B4-BE49-F238E27FC236}">
+                <a16:creationId xmlns:a16="http://schemas.microsoft.com/office/drawing/2014/main" id="{967768F2-76AD-4898-ABAE-26C158880624}"/>
+              </a:ext>
+            </a:extLst>
+          </p:cNvPr>
+          <p:cNvSpPr>
+            <a:spLocks noGrp="1"/>
+          </p:cNvSpPr>
+          <p:nvPr>
+            <p:ph type="sldNum" sz="quarter" idx="12"/>
+          </p:nvPr>
+        </p:nvSpPr>
+        <p:spPr/>
+        <p:txBody>
+          <a:bodyPr/>
+          <a:lstStyle/>
+          <a:p>
+            <a:fld id="{9F4AF89A-28FA-47FA-B28F-9A9C6913CB7A}" type="slidenum">
+              <a:rPr lang="ko-KR" altLang="en-US" smtClean="0"/>
+              <a:t>10</a:t>
+            </a:fld>
+            <a:endParaRPr lang="ko-KR" altLang="en-US" dirty="0"/>
+          </a:p>
+        </p:txBody>
+      </p:sp>
+      <p:sp>
+        <p:nvSpPr>
+          <p:cNvPr id="11" name="내용 개체 틀 10">
+            <a:extLst>
+              <a:ext uri="{FF2B5EF4-FFF2-40B4-BE49-F238E27FC236}">
+                <a16:creationId xmlns:a16="http://schemas.microsoft.com/office/drawing/2014/main" id="{2F49DB3D-7569-41CE-98E6-0D040C938EC9}"/>
+              </a:ext>
+            </a:extLst>
+          </p:cNvPr>
+          <p:cNvSpPr>
+            <a:spLocks noGrp="1"/>
+          </p:cNvSpPr>
+          <p:nvPr>
+            <p:ph idx="1"/>
+          </p:nvPr>
+        </p:nvSpPr>
+        <p:spPr/>
+        <p:txBody>
+          <a:bodyPr/>
+          <a:lstStyle/>
+          <a:p>
+            <a:r>
+              <a:rPr lang="ko-KR" altLang="en-US" dirty="0"/>
+              <a:t>총 환자수가 </a:t>
+            </a:r>
+            <a:r>
+              <a:rPr lang="en-US" altLang="ko-KR" dirty="0"/>
+              <a:t>1,673</a:t>
+            </a:r>
+            <a:r>
+              <a:rPr lang="ko-KR" altLang="en-US" dirty="0"/>
+              <a:t>명인 이유</a:t>
+            </a:r>
+            <a:endParaRPr lang="en-US" altLang="ko-KR" dirty="0"/>
+          </a:p>
+          <a:p>
+            <a:pPr lvl="1"/>
+            <a:r>
+              <a:rPr lang="en-US" altLang="ko-KR" dirty="0"/>
+              <a:t>Clinic Data </a:t>
+            </a:r>
+            <a:r>
+              <a:rPr lang="ko-KR" altLang="en-US" dirty="0"/>
+              <a:t>수 </a:t>
+            </a:r>
+            <a:r>
+              <a:rPr lang="en-US" altLang="ko-KR" dirty="0"/>
+              <a:t>: 3,672 </a:t>
+            </a:r>
+            <a:r>
+              <a:rPr lang="ko-KR" altLang="en-US" dirty="0"/>
+              <a:t>→ 중복 </a:t>
+            </a:r>
+            <a:r>
+              <a:rPr lang="en-US" altLang="ko-KR" dirty="0" err="1"/>
+              <a:t>PatientID</a:t>
+            </a:r>
+            <a:r>
+              <a:rPr lang="en-US" altLang="ko-KR" dirty="0"/>
+              <a:t> </a:t>
+            </a:r>
+            <a:r>
+              <a:rPr lang="ko-KR" altLang="en-US" dirty="0"/>
+              <a:t>제거 </a:t>
+            </a:r>
+            <a:r>
+              <a:rPr lang="en-US" altLang="ko-KR" dirty="0"/>
+              <a:t>: 2,025 </a:t>
+            </a:r>
+            <a:r>
+              <a:rPr lang="ko-KR" altLang="en-US" dirty="0"/>
+              <a:t>→ </a:t>
+            </a:r>
+            <a:r>
+              <a:rPr lang="en-US" altLang="ko-KR" dirty="0"/>
+              <a:t>TAMA outlier(0, 1)</a:t>
+            </a:r>
+            <a:r>
+              <a:rPr lang="ko-KR" altLang="en-US" dirty="0"/>
+              <a:t> 제거 </a:t>
+            </a:r>
+            <a:r>
+              <a:rPr lang="en-US" altLang="ko-KR" dirty="0"/>
+              <a:t>: 2,023</a:t>
+            </a:r>
+          </a:p>
+          <a:p>
+            <a:pPr lvl="1"/>
+            <a:r>
+              <a:rPr lang="en-US" altLang="ko-KR" dirty="0"/>
+              <a:t>Axial Data </a:t>
+            </a:r>
+            <a:r>
+              <a:rPr lang="ko-KR" altLang="en-US" dirty="0"/>
+              <a:t>수 </a:t>
+            </a:r>
+            <a:r>
+              <a:rPr lang="en-US" altLang="ko-KR" dirty="0"/>
+              <a:t>: 2,023 </a:t>
+            </a:r>
+            <a:r>
+              <a:rPr lang="ko-KR" altLang="en-US" dirty="0"/>
+              <a:t>→ </a:t>
+            </a:r>
+            <a:r>
+              <a:rPr lang="en-US" altLang="ko-KR" dirty="0"/>
+              <a:t>Fixed Tube Current Value </a:t>
+            </a:r>
+            <a:r>
+              <a:rPr lang="ko-KR" altLang="en-US" dirty="0"/>
+              <a:t>제거 </a:t>
+            </a:r>
+            <a:r>
+              <a:rPr lang="en-US" altLang="ko-KR" dirty="0"/>
+              <a:t>: 1,673</a:t>
+            </a:r>
+          </a:p>
+        </p:txBody>
+      </p:sp>
+    </p:spTree>
+    <p:extLst>
+      <p:ext uri="{BB962C8B-B14F-4D97-AF65-F5344CB8AC3E}">
+        <p14:creationId xmlns:p14="http://schemas.microsoft.com/office/powerpoint/2010/main" val="1327445754"/>
+      </p:ext>
+    </p:extLst>
+  </p:cSld>
+  <p:clrMapOvr>
+    <a:masterClrMapping/>
+  </p:clrMapOvr>
+</p:sld>
+</file>
+
+<file path=ppt/slides/slide11.xml><?xml version="1.0" encoding="utf-8"?>
+<p:sld xmlns:a="http://schemas.openxmlformats.org/drawingml/2006/main" xmlns:r="http://schemas.openxmlformats.org/officeDocument/2006/relationships" xmlns:p="http://schemas.openxmlformats.org/presentationml/2006/main">
+  <p:cSld>
+    <p:spTree>
+      <p:nvGrpSpPr>
+        <p:cNvPr id="1" name=""/>
+        <p:cNvGrpSpPr/>
+        <p:nvPr/>
+      </p:nvGrpSpPr>
+      <p:grpSpPr>
+        <a:xfrm>
+          <a:off x="0" y="0"/>
+          <a:ext cx="0" cy="0"/>
+          <a:chOff x="0" y="0"/>
+          <a:chExt cx="0" cy="0"/>
+        </a:xfrm>
+      </p:grpSpPr>
       <p:pic>
         <p:nvPicPr>
           <p:cNvPr id="6" name="그림 5">
@@ -9184,7 +9391,7 @@
           <a:p>
             <a:fld id="{9F4AF89A-28FA-47FA-B28F-9A9C6913CB7A}" type="slidenum">
               <a:rPr lang="ko-KR" altLang="en-US" smtClean="0"/>
-              <a:t>10</a:t>
+              <a:t>11</a:t>
             </a:fld>
             <a:endParaRPr lang="ko-KR" altLang="en-US" dirty="0"/>
           </a:p>
@@ -9318,213 +9525,6 @@
     <p:extLst>
       <p:ext uri="{BB962C8B-B14F-4D97-AF65-F5344CB8AC3E}">
         <p14:creationId xmlns:p14="http://schemas.microsoft.com/office/powerpoint/2010/main" val="79559792"/>
-      </p:ext>
-    </p:extLst>
-  </p:cSld>
-  <p:clrMapOvr>
-    <a:masterClrMapping/>
-  </p:clrMapOvr>
-</p:sld>
-</file>
-
-<file path=ppt/slides/slide11.xml><?xml version="1.0" encoding="utf-8"?>
-<p:sld xmlns:a="http://schemas.openxmlformats.org/drawingml/2006/main" xmlns:r="http://schemas.openxmlformats.org/officeDocument/2006/relationships" xmlns:p="http://schemas.openxmlformats.org/presentationml/2006/main">
-  <p:cSld>
-    <p:spTree>
-      <p:nvGrpSpPr>
-        <p:cNvPr id="1" name=""/>
-        <p:cNvGrpSpPr/>
-        <p:nvPr/>
-      </p:nvGrpSpPr>
-      <p:grpSpPr>
-        <a:xfrm>
-          <a:off x="0" y="0"/>
-          <a:ext cx="0" cy="0"/>
-          <a:chOff x="0" y="0"/>
-          <a:chExt cx="0" cy="0"/>
-        </a:xfrm>
-      </p:grpSpPr>
-      <p:sp>
-        <p:nvSpPr>
-          <p:cNvPr id="2" name="제목 1">
-            <a:extLst>
-              <a:ext uri="{FF2B5EF4-FFF2-40B4-BE49-F238E27FC236}">
-                <a16:creationId xmlns:a16="http://schemas.microsoft.com/office/drawing/2014/main" id="{9AF0C8C8-C4B1-4336-9468-E6803A595282}"/>
-              </a:ext>
-            </a:extLst>
-          </p:cNvPr>
-          <p:cNvSpPr>
-            <a:spLocks noGrp="1"/>
-          </p:cNvSpPr>
-          <p:nvPr>
-            <p:ph type="title"/>
-          </p:nvPr>
-        </p:nvSpPr>
-        <p:spPr/>
-        <p:txBody>
-          <a:bodyPr/>
-          <a:lstStyle/>
-          <a:p>
-            <a:r>
-              <a:rPr lang="en-US" altLang="ko-KR" dirty="0"/>
-              <a:t>3. Detailed progress</a:t>
-            </a:r>
-            <a:endParaRPr lang="ko-KR" altLang="en-US" dirty="0"/>
-          </a:p>
-        </p:txBody>
-      </p:sp>
-      <p:sp>
-        <p:nvSpPr>
-          <p:cNvPr id="4" name="슬라이드 번호 개체 틀 3">
-            <a:extLst>
-              <a:ext uri="{FF2B5EF4-FFF2-40B4-BE49-F238E27FC236}">
-                <a16:creationId xmlns:a16="http://schemas.microsoft.com/office/drawing/2014/main" id="{967768F2-76AD-4898-ABAE-26C158880624}"/>
-              </a:ext>
-            </a:extLst>
-          </p:cNvPr>
-          <p:cNvSpPr>
-            <a:spLocks noGrp="1"/>
-          </p:cNvSpPr>
-          <p:nvPr>
-            <p:ph type="sldNum" sz="quarter" idx="12"/>
-          </p:nvPr>
-        </p:nvSpPr>
-        <p:spPr/>
-        <p:txBody>
-          <a:bodyPr/>
-          <a:lstStyle/>
-          <a:p>
-            <a:fld id="{9F4AF89A-28FA-47FA-B28F-9A9C6913CB7A}" type="slidenum">
-              <a:rPr lang="ko-KR" altLang="en-US" smtClean="0"/>
-              <a:t>11</a:t>
-            </a:fld>
-            <a:endParaRPr lang="ko-KR" altLang="en-US" dirty="0"/>
-          </a:p>
-        </p:txBody>
-      </p:sp>
-      <p:sp>
-        <p:nvSpPr>
-          <p:cNvPr id="11" name="내용 개체 틀 10">
-            <a:extLst>
-              <a:ext uri="{FF2B5EF4-FFF2-40B4-BE49-F238E27FC236}">
-                <a16:creationId xmlns:a16="http://schemas.microsoft.com/office/drawing/2014/main" id="{2F49DB3D-7569-41CE-98E6-0D040C938EC9}"/>
-              </a:ext>
-            </a:extLst>
-          </p:cNvPr>
-          <p:cNvSpPr>
-            <a:spLocks noGrp="1"/>
-          </p:cNvSpPr>
-          <p:nvPr>
-            <p:ph idx="1"/>
-          </p:nvPr>
-        </p:nvSpPr>
-        <p:spPr/>
-        <p:txBody>
-          <a:bodyPr/>
-          <a:lstStyle/>
-          <a:p>
-            <a:r>
-              <a:rPr lang="ko-KR" altLang="en-US" dirty="0"/>
-              <a:t>총 환자수가 </a:t>
-            </a:r>
-            <a:r>
-              <a:rPr lang="en-US" altLang="ko-KR" dirty="0"/>
-              <a:t>1,673</a:t>
-            </a:r>
-            <a:r>
-              <a:rPr lang="ko-KR" altLang="en-US" dirty="0"/>
-              <a:t>명인 이유</a:t>
-            </a:r>
-            <a:endParaRPr lang="en-US" altLang="ko-KR" dirty="0"/>
-          </a:p>
-          <a:p>
-            <a:pPr lvl="1"/>
-            <a:r>
-              <a:rPr lang="en-US" altLang="ko-KR" dirty="0"/>
-              <a:t>Clinic Data </a:t>
-            </a:r>
-            <a:r>
-              <a:rPr lang="ko-KR" altLang="en-US" dirty="0"/>
-              <a:t>수 </a:t>
-            </a:r>
-            <a:r>
-              <a:rPr lang="en-US" altLang="ko-KR" dirty="0"/>
-              <a:t>: 3,672 </a:t>
-            </a:r>
-            <a:r>
-              <a:rPr lang="ko-KR" altLang="en-US" dirty="0"/>
-              <a:t>→ 중복 </a:t>
-            </a:r>
-            <a:r>
-              <a:rPr lang="en-US" altLang="ko-KR" dirty="0" err="1"/>
-              <a:t>PatientID</a:t>
-            </a:r>
-            <a:r>
-              <a:rPr lang="en-US" altLang="ko-KR" dirty="0"/>
-              <a:t> </a:t>
-            </a:r>
-            <a:r>
-              <a:rPr lang="ko-KR" altLang="en-US" dirty="0"/>
-              <a:t>제거 </a:t>
-            </a:r>
-            <a:r>
-              <a:rPr lang="en-US" altLang="ko-KR" dirty="0"/>
-              <a:t>: 2,025 </a:t>
-            </a:r>
-            <a:r>
-              <a:rPr lang="ko-KR" altLang="en-US" dirty="0"/>
-              <a:t>→ </a:t>
-            </a:r>
-            <a:r>
-              <a:rPr lang="en-US" altLang="ko-KR" dirty="0"/>
-              <a:t>TAMA outlier(0, 1)</a:t>
-            </a:r>
-            <a:r>
-              <a:rPr lang="ko-KR" altLang="en-US" dirty="0"/>
-              <a:t> 제거 </a:t>
-            </a:r>
-            <a:r>
-              <a:rPr lang="en-US" altLang="ko-KR" dirty="0"/>
-              <a:t>: 2,023</a:t>
-            </a:r>
-          </a:p>
-          <a:p>
-            <a:pPr lvl="1"/>
-            <a:r>
-              <a:rPr lang="en-US" altLang="ko-KR" dirty="0"/>
-              <a:t>Axial Data </a:t>
-            </a:r>
-            <a:r>
-              <a:rPr lang="ko-KR" altLang="en-US" dirty="0"/>
-              <a:t>수 </a:t>
-            </a:r>
-            <a:r>
-              <a:rPr lang="en-US" altLang="ko-KR" dirty="0"/>
-              <a:t>: 2,023 </a:t>
-            </a:r>
-            <a:r>
-              <a:rPr lang="ko-KR" altLang="en-US" dirty="0"/>
-              <a:t>→ </a:t>
-            </a:r>
-            <a:r>
-              <a:rPr lang="en-US" altLang="ko-KR" dirty="0"/>
-              <a:t>Fixed Tube Current Value </a:t>
-            </a:r>
-            <a:r>
-              <a:rPr lang="ko-KR" altLang="en-US" dirty="0"/>
-              <a:t>제거 </a:t>
-            </a:r>
-            <a:r>
-              <a:rPr lang="en-US" altLang="ko-KR" dirty="0"/>
-              <a:t>: 1,673</a:t>
-            </a:r>
-          </a:p>
-        </p:txBody>
-      </p:sp>
-    </p:spTree>
-    <p:extLst>
-      <p:ext uri="{BB962C8B-B14F-4D97-AF65-F5344CB8AC3E}">
-        <p14:creationId xmlns:p14="http://schemas.microsoft.com/office/powerpoint/2010/main" val="1327445754"/>
       </p:ext>
     </p:extLst>
   </p:cSld>
@@ -11801,6 +11801,223 @@
         <p:cNvPr id="1" name="">
           <a:extLst>
             <a:ext uri="{FF2B5EF4-FFF2-40B4-BE49-F238E27FC236}">
+              <a16:creationId xmlns:a16="http://schemas.microsoft.com/office/drawing/2014/main" id="{DC217591-5C0D-5A51-134D-715536A90418}"/>
+            </a:ext>
+          </a:extLst>
+        </p:cNvPr>
+        <p:cNvGrpSpPr/>
+        <p:nvPr/>
+      </p:nvGrpSpPr>
+      <p:grpSpPr>
+        <a:xfrm>
+          <a:off x="0" y="0"/>
+          <a:ext cx="0" cy="0"/>
+          <a:chOff x="0" y="0"/>
+          <a:chExt cx="0" cy="0"/>
+        </a:xfrm>
+      </p:grpSpPr>
+      <p:sp>
+        <p:nvSpPr>
+          <p:cNvPr id="2" name="제목 1">
+            <a:extLst>
+              <a:ext uri="{FF2B5EF4-FFF2-40B4-BE49-F238E27FC236}">
+                <a16:creationId xmlns:a16="http://schemas.microsoft.com/office/drawing/2014/main" id="{69EA5533-F6F1-F9CD-797E-C2FA290BEC34}"/>
+              </a:ext>
+            </a:extLst>
+          </p:cNvPr>
+          <p:cNvSpPr>
+            <a:spLocks noGrp="1"/>
+          </p:cNvSpPr>
+          <p:nvPr>
+            <p:ph type="title"/>
+          </p:nvPr>
+        </p:nvSpPr>
+        <p:spPr/>
+        <p:txBody>
+          <a:bodyPr/>
+          <a:lstStyle/>
+          <a:p>
+            <a:r>
+              <a:rPr lang="en-US" altLang="ko-KR" dirty="0"/>
+              <a:t>3. Detailed progress</a:t>
+            </a:r>
+            <a:endParaRPr lang="ko-KR" altLang="en-US" dirty="0"/>
+          </a:p>
+        </p:txBody>
+      </p:sp>
+      <p:sp>
+        <p:nvSpPr>
+          <p:cNvPr id="4" name="슬라이드 번호 개체 틀 3">
+            <a:extLst>
+              <a:ext uri="{FF2B5EF4-FFF2-40B4-BE49-F238E27FC236}">
+                <a16:creationId xmlns:a16="http://schemas.microsoft.com/office/drawing/2014/main" id="{6EC364F1-27A3-AB98-D76B-9096583CD1DE}"/>
+              </a:ext>
+            </a:extLst>
+          </p:cNvPr>
+          <p:cNvSpPr>
+            <a:spLocks noGrp="1"/>
+          </p:cNvSpPr>
+          <p:nvPr>
+            <p:ph type="sldNum" sz="quarter" idx="12"/>
+          </p:nvPr>
+        </p:nvSpPr>
+        <p:spPr/>
+        <p:txBody>
+          <a:bodyPr/>
+          <a:lstStyle/>
+          <a:p>
+            <a:fld id="{9F4AF89A-28FA-47FA-B28F-9A9C6913CB7A}" type="slidenum">
+              <a:rPr lang="ko-KR" altLang="en-US" smtClean="0"/>
+              <a:t>13</a:t>
+            </a:fld>
+            <a:endParaRPr lang="ko-KR" altLang="en-US" dirty="0"/>
+          </a:p>
+        </p:txBody>
+      </p:sp>
+      <p:sp>
+        <p:nvSpPr>
+          <p:cNvPr id="11" name="내용 개체 틀 10">
+            <a:extLst>
+              <a:ext uri="{FF2B5EF4-FFF2-40B4-BE49-F238E27FC236}">
+                <a16:creationId xmlns:a16="http://schemas.microsoft.com/office/drawing/2014/main" id="{4925A88E-9A76-1866-300E-75B3BD583781}"/>
+              </a:ext>
+            </a:extLst>
+          </p:cNvPr>
+          <p:cNvSpPr>
+            <a:spLocks noGrp="1"/>
+          </p:cNvSpPr>
+          <p:nvPr>
+            <p:ph idx="1"/>
+          </p:nvPr>
+        </p:nvSpPr>
+        <p:spPr/>
+        <p:txBody>
+          <a:bodyPr/>
+          <a:lstStyle/>
+          <a:p>
+            <a:r>
+              <a:rPr lang="ko-KR" altLang="en-US" dirty="0"/>
+              <a:t>총 환자수가 </a:t>
+            </a:r>
+            <a:r>
+              <a:rPr lang="en-US" altLang="ko-KR" dirty="0"/>
+              <a:t>1,269</a:t>
+            </a:r>
+            <a:r>
+              <a:rPr lang="ko-KR" altLang="en-US" dirty="0"/>
+              <a:t>명인 이유</a:t>
+            </a:r>
+            <a:endParaRPr lang="en-US" altLang="ko-KR" dirty="0"/>
+          </a:p>
+          <a:p>
+            <a:pPr lvl="1"/>
+            <a:r>
+              <a:rPr lang="en-US" altLang="ko-KR" dirty="0"/>
+              <a:t>Clinic Data </a:t>
+            </a:r>
+            <a:r>
+              <a:rPr lang="ko-KR" altLang="en-US" dirty="0"/>
+              <a:t>수 </a:t>
+            </a:r>
+            <a:r>
+              <a:rPr lang="en-US" altLang="ko-KR" dirty="0"/>
+              <a:t>: 3,162 </a:t>
+            </a:r>
+            <a:r>
+              <a:rPr lang="ko-KR" altLang="en-US" dirty="0"/>
+              <a:t>→ 중복 </a:t>
+            </a:r>
+            <a:r>
+              <a:rPr lang="en-US" altLang="ko-KR" dirty="0" err="1"/>
+              <a:t>PatientID</a:t>
+            </a:r>
+            <a:r>
+              <a:rPr lang="en-US" altLang="ko-KR" dirty="0"/>
+              <a:t> </a:t>
+            </a:r>
+            <a:r>
+              <a:rPr lang="ko-KR" altLang="en-US" dirty="0"/>
+              <a:t>제거 </a:t>
+            </a:r>
+            <a:r>
+              <a:rPr lang="en-US" altLang="ko-KR" dirty="0"/>
+              <a:t>: 3,162 </a:t>
+            </a:r>
+            <a:r>
+              <a:rPr lang="ko-KR" altLang="en-US" dirty="0"/>
+              <a:t>→ </a:t>
+            </a:r>
+            <a:r>
+              <a:rPr lang="en-US" altLang="ko-KR" dirty="0"/>
+              <a:t>TAMA </a:t>
+            </a:r>
+            <a:r>
+              <a:rPr lang="ko-KR" altLang="en-US" dirty="0" err="1"/>
+              <a:t>결측치</a:t>
+            </a:r>
+            <a:r>
+              <a:rPr lang="ko-KR" altLang="en-US" dirty="0"/>
+              <a:t> 제거 </a:t>
+            </a:r>
+            <a:r>
+              <a:rPr lang="en-US" altLang="ko-KR" dirty="0"/>
+              <a:t>: 2,257</a:t>
+            </a:r>
+          </a:p>
+          <a:p>
+            <a:pPr lvl="1"/>
+            <a:r>
+              <a:rPr lang="en-US" altLang="ko-KR" dirty="0"/>
+              <a:t>Axial Data </a:t>
+            </a:r>
+            <a:r>
+              <a:rPr lang="ko-KR" altLang="en-US" dirty="0"/>
+              <a:t>수 </a:t>
+            </a:r>
+            <a:r>
+              <a:rPr lang="en-US" altLang="ko-KR" dirty="0"/>
+              <a:t>: 2,257 </a:t>
+            </a:r>
+            <a:r>
+              <a:rPr lang="ko-KR" altLang="en-US" dirty="0"/>
+              <a:t>→ </a:t>
+            </a:r>
+            <a:r>
+              <a:rPr lang="en-US" altLang="ko-KR" dirty="0"/>
+              <a:t>[Fixed | No] Tube Current Value </a:t>
+            </a:r>
+            <a:r>
+              <a:rPr lang="ko-KR" altLang="en-US" dirty="0"/>
+              <a:t>제거 </a:t>
+            </a:r>
+            <a:r>
+              <a:rPr lang="en-US" altLang="ko-KR" dirty="0"/>
+              <a:t>: 1,269</a:t>
+            </a:r>
+          </a:p>
+        </p:txBody>
+      </p:sp>
+    </p:spTree>
+    <p:extLst>
+      <p:ext uri="{BB962C8B-B14F-4D97-AF65-F5344CB8AC3E}">
+        <p14:creationId xmlns:p14="http://schemas.microsoft.com/office/powerpoint/2010/main" val="3567372362"/>
+      </p:ext>
+    </p:extLst>
+  </p:cSld>
+  <p:clrMapOvr>
+    <a:masterClrMapping/>
+  </p:clrMapOvr>
+</p:sld>
+</file>
+
+<file path=ppt/slides/slide14.xml><?xml version="1.0" encoding="utf-8"?>
+<p:sld xmlns:a="http://schemas.openxmlformats.org/drawingml/2006/main" xmlns:r="http://schemas.openxmlformats.org/officeDocument/2006/relationships" xmlns:p="http://schemas.openxmlformats.org/presentationml/2006/main">
+  <p:cSld>
+    <p:spTree>
+      <p:nvGrpSpPr>
+        <p:cNvPr id="1" name="">
+          <a:extLst>
+            <a:ext uri="{FF2B5EF4-FFF2-40B4-BE49-F238E27FC236}">
               <a16:creationId xmlns:a16="http://schemas.microsoft.com/office/drawing/2014/main" id="{2158461A-C233-43B7-338E-82A39EDF3107}"/>
             </a:ext>
           </a:extLst>
@@ -11940,7 +12157,7 @@
           <a:p>
             <a:fld id="{9F4AF89A-28FA-47FA-B28F-9A9C6913CB7A}" type="slidenum">
               <a:rPr lang="ko-KR" altLang="en-US" smtClean="0"/>
-              <a:t>13</a:t>
+              <a:t>14</a:t>
             </a:fld>
             <a:endParaRPr lang="ko-KR" altLang="en-US" dirty="0"/>
           </a:p>
@@ -12038,223 +12255,6 @@
     <p:extLst>
       <p:ext uri="{BB962C8B-B14F-4D97-AF65-F5344CB8AC3E}">
         <p14:creationId xmlns:p14="http://schemas.microsoft.com/office/powerpoint/2010/main" val="2035619833"/>
-      </p:ext>
-    </p:extLst>
-  </p:cSld>
-  <p:clrMapOvr>
-    <a:masterClrMapping/>
-  </p:clrMapOvr>
-</p:sld>
-</file>
-
-<file path=ppt/slides/slide14.xml><?xml version="1.0" encoding="utf-8"?>
-<p:sld xmlns:a="http://schemas.openxmlformats.org/drawingml/2006/main" xmlns:r="http://schemas.openxmlformats.org/officeDocument/2006/relationships" xmlns:p="http://schemas.openxmlformats.org/presentationml/2006/main">
-  <p:cSld>
-    <p:spTree>
-      <p:nvGrpSpPr>
-        <p:cNvPr id="1" name="">
-          <a:extLst>
-            <a:ext uri="{FF2B5EF4-FFF2-40B4-BE49-F238E27FC236}">
-              <a16:creationId xmlns:a16="http://schemas.microsoft.com/office/drawing/2014/main" id="{DC217591-5C0D-5A51-134D-715536A90418}"/>
-            </a:ext>
-          </a:extLst>
-        </p:cNvPr>
-        <p:cNvGrpSpPr/>
-        <p:nvPr/>
-      </p:nvGrpSpPr>
-      <p:grpSpPr>
-        <a:xfrm>
-          <a:off x="0" y="0"/>
-          <a:ext cx="0" cy="0"/>
-          <a:chOff x="0" y="0"/>
-          <a:chExt cx="0" cy="0"/>
-        </a:xfrm>
-      </p:grpSpPr>
-      <p:sp>
-        <p:nvSpPr>
-          <p:cNvPr id="2" name="제목 1">
-            <a:extLst>
-              <a:ext uri="{FF2B5EF4-FFF2-40B4-BE49-F238E27FC236}">
-                <a16:creationId xmlns:a16="http://schemas.microsoft.com/office/drawing/2014/main" id="{69EA5533-F6F1-F9CD-797E-C2FA290BEC34}"/>
-              </a:ext>
-            </a:extLst>
-          </p:cNvPr>
-          <p:cNvSpPr>
-            <a:spLocks noGrp="1"/>
-          </p:cNvSpPr>
-          <p:nvPr>
-            <p:ph type="title"/>
-          </p:nvPr>
-        </p:nvSpPr>
-        <p:spPr/>
-        <p:txBody>
-          <a:bodyPr/>
-          <a:lstStyle/>
-          <a:p>
-            <a:r>
-              <a:rPr lang="en-US" altLang="ko-KR" dirty="0"/>
-              <a:t>3. Detailed progress</a:t>
-            </a:r>
-            <a:endParaRPr lang="ko-KR" altLang="en-US" dirty="0"/>
-          </a:p>
-        </p:txBody>
-      </p:sp>
-      <p:sp>
-        <p:nvSpPr>
-          <p:cNvPr id="4" name="슬라이드 번호 개체 틀 3">
-            <a:extLst>
-              <a:ext uri="{FF2B5EF4-FFF2-40B4-BE49-F238E27FC236}">
-                <a16:creationId xmlns:a16="http://schemas.microsoft.com/office/drawing/2014/main" id="{6EC364F1-27A3-AB98-D76B-9096583CD1DE}"/>
-              </a:ext>
-            </a:extLst>
-          </p:cNvPr>
-          <p:cNvSpPr>
-            <a:spLocks noGrp="1"/>
-          </p:cNvSpPr>
-          <p:nvPr>
-            <p:ph type="sldNum" sz="quarter" idx="12"/>
-          </p:nvPr>
-        </p:nvSpPr>
-        <p:spPr/>
-        <p:txBody>
-          <a:bodyPr/>
-          <a:lstStyle/>
-          <a:p>
-            <a:fld id="{9F4AF89A-28FA-47FA-B28F-9A9C6913CB7A}" type="slidenum">
-              <a:rPr lang="ko-KR" altLang="en-US" smtClean="0"/>
-              <a:t>14</a:t>
-            </a:fld>
-            <a:endParaRPr lang="ko-KR" altLang="en-US" dirty="0"/>
-          </a:p>
-        </p:txBody>
-      </p:sp>
-      <p:sp>
-        <p:nvSpPr>
-          <p:cNvPr id="11" name="내용 개체 틀 10">
-            <a:extLst>
-              <a:ext uri="{FF2B5EF4-FFF2-40B4-BE49-F238E27FC236}">
-                <a16:creationId xmlns:a16="http://schemas.microsoft.com/office/drawing/2014/main" id="{4925A88E-9A76-1866-300E-75B3BD583781}"/>
-              </a:ext>
-            </a:extLst>
-          </p:cNvPr>
-          <p:cNvSpPr>
-            <a:spLocks noGrp="1"/>
-          </p:cNvSpPr>
-          <p:nvPr>
-            <p:ph idx="1"/>
-          </p:nvPr>
-        </p:nvSpPr>
-        <p:spPr/>
-        <p:txBody>
-          <a:bodyPr/>
-          <a:lstStyle/>
-          <a:p>
-            <a:r>
-              <a:rPr lang="ko-KR" altLang="en-US" dirty="0"/>
-              <a:t>총 환자수가 </a:t>
-            </a:r>
-            <a:r>
-              <a:rPr lang="en-US" altLang="ko-KR" dirty="0"/>
-              <a:t>1,269</a:t>
-            </a:r>
-            <a:r>
-              <a:rPr lang="ko-KR" altLang="en-US" dirty="0"/>
-              <a:t>명인 이유</a:t>
-            </a:r>
-            <a:endParaRPr lang="en-US" altLang="ko-KR" dirty="0"/>
-          </a:p>
-          <a:p>
-            <a:pPr lvl="1"/>
-            <a:r>
-              <a:rPr lang="en-US" altLang="ko-KR" dirty="0"/>
-              <a:t>Clinic Data </a:t>
-            </a:r>
-            <a:r>
-              <a:rPr lang="ko-KR" altLang="en-US" dirty="0"/>
-              <a:t>수 </a:t>
-            </a:r>
-            <a:r>
-              <a:rPr lang="en-US" altLang="ko-KR" dirty="0"/>
-              <a:t>: 3,162 </a:t>
-            </a:r>
-            <a:r>
-              <a:rPr lang="ko-KR" altLang="en-US" dirty="0"/>
-              <a:t>→ 중복 </a:t>
-            </a:r>
-            <a:r>
-              <a:rPr lang="en-US" altLang="ko-KR" dirty="0" err="1"/>
-              <a:t>PatientID</a:t>
-            </a:r>
-            <a:r>
-              <a:rPr lang="en-US" altLang="ko-KR" dirty="0"/>
-              <a:t> </a:t>
-            </a:r>
-            <a:r>
-              <a:rPr lang="ko-KR" altLang="en-US" dirty="0"/>
-              <a:t>제거 </a:t>
-            </a:r>
-            <a:r>
-              <a:rPr lang="en-US" altLang="ko-KR" dirty="0"/>
-              <a:t>: 3,162 </a:t>
-            </a:r>
-            <a:r>
-              <a:rPr lang="ko-KR" altLang="en-US" dirty="0"/>
-              <a:t>→ </a:t>
-            </a:r>
-            <a:r>
-              <a:rPr lang="en-US" altLang="ko-KR" dirty="0"/>
-              <a:t>TAMA </a:t>
-            </a:r>
-            <a:r>
-              <a:rPr lang="ko-KR" altLang="en-US" dirty="0" err="1"/>
-              <a:t>결측치</a:t>
-            </a:r>
-            <a:r>
-              <a:rPr lang="ko-KR" altLang="en-US" dirty="0"/>
-              <a:t> 제거 </a:t>
-            </a:r>
-            <a:r>
-              <a:rPr lang="en-US" altLang="ko-KR" dirty="0"/>
-              <a:t>: 2,257</a:t>
-            </a:r>
-          </a:p>
-          <a:p>
-            <a:pPr lvl="1"/>
-            <a:r>
-              <a:rPr lang="en-US" altLang="ko-KR" dirty="0"/>
-              <a:t>Axial Data </a:t>
-            </a:r>
-            <a:r>
-              <a:rPr lang="ko-KR" altLang="en-US" dirty="0"/>
-              <a:t>수 </a:t>
-            </a:r>
-            <a:r>
-              <a:rPr lang="en-US" altLang="ko-KR" dirty="0"/>
-              <a:t>: 2,257 </a:t>
-            </a:r>
-            <a:r>
-              <a:rPr lang="ko-KR" altLang="en-US" dirty="0"/>
-              <a:t>→ </a:t>
-            </a:r>
-            <a:r>
-              <a:rPr lang="en-US" altLang="ko-KR" dirty="0"/>
-              <a:t>[Fixed | No] Tube Current Value </a:t>
-            </a:r>
-            <a:r>
-              <a:rPr lang="ko-KR" altLang="en-US" dirty="0"/>
-              <a:t>제거 </a:t>
-            </a:r>
-            <a:r>
-              <a:rPr lang="en-US" altLang="ko-KR" dirty="0"/>
-              <a:t>: 1,269</a:t>
-            </a:r>
-          </a:p>
-        </p:txBody>
-      </p:sp>
-    </p:spTree>
-    <p:extLst>
-      <p:ext uri="{BB962C8B-B14F-4D97-AF65-F5344CB8AC3E}">
-        <p14:creationId xmlns:p14="http://schemas.microsoft.com/office/powerpoint/2010/main" val="3567372362"/>
       </p:ext>
     </p:extLst>
   </p:cSld>
@@ -26222,7 +26222,7 @@
             </a:r>
             <a:r>
               <a:rPr lang="ko-KR" altLang="en-US" dirty="0"/>
-              <a:t>강남</a:t>
+              <a:t>신촌</a:t>
             </a:r>
             <a:endParaRPr lang="en-US" altLang="ko-KR" dirty="0"/>
           </a:p>
@@ -27484,7 +27484,7 @@
             </a:r>
             <a:r>
               <a:rPr lang="ko-KR" altLang="en-US" dirty="0"/>
-              <a:t>강남</a:t>
+              <a:t>신촌</a:t>
             </a:r>
             <a:endParaRPr lang="en-US" altLang="ko-KR" dirty="0"/>
           </a:p>
@@ -29207,14 +29207,14 @@
           <p:nvPr>
             <p:extLst>
               <p:ext uri="{D42A27DB-BD31-4B8C-83A1-F6EECF244321}">
-                <p14:modId xmlns:p14="http://schemas.microsoft.com/office/powerpoint/2010/main" val="706449785"/>
+                <p14:modId xmlns:p14="http://schemas.microsoft.com/office/powerpoint/2010/main" val="3974358084"/>
               </p:ext>
             </p:extLst>
           </p:nvPr>
         </p:nvGraphicFramePr>
         <p:xfrm>
           <a:off x="1056000" y="1652395"/>
-          <a:ext cx="10080000" cy="2420842"/>
+          <a:ext cx="10080000" cy="2503554"/>
         </p:xfrm>
         <a:graphic>
           <a:graphicData uri="http://schemas.openxmlformats.org/drawingml/2006/table">
@@ -29301,13 +29301,26 @@
                     <a:p>
                       <a:pPr algn="ctr"/>
                       <a:r>
-                        <a:rPr sz="1100" b="1">
+                        <a:rPr sz="1100" b="1" dirty="0">
                           <a:solidFill>
                             <a:srgbClr val="FFFFFF"/>
                           </a:solidFill>
                         </a:rPr>
-                        <a:t>β 계수</a:t>
-                      </a:r>
+                        <a:t>β </a:t>
+                      </a:r>
+                      <a:r>
+                        <a:rPr sz="1100" b="1" dirty="0" err="1">
+                          <a:solidFill>
+                            <a:srgbClr val="FFFFFF"/>
+                          </a:solidFill>
+                        </a:rPr>
+                        <a:t>계수</a:t>
+                      </a:r>
+                      <a:endParaRPr sz="1100" b="1" dirty="0">
+                        <a:solidFill>
+                          <a:srgbClr val="FFFFFF"/>
+                        </a:solidFill>
+                      </a:endParaRPr>
                     </a:p>
                   </a:txBody>
                   <a:tcPr anchor="ctr">
@@ -29323,7 +29336,7 @@
                     <a:p>
                       <a:pPr algn="ctr"/>
                       <a:r>
-                        <a:rPr sz="1100" b="1">
+                        <a:rPr sz="1100" b="1" dirty="0">
                           <a:solidFill>
                             <a:srgbClr val="FFFFFF"/>
                           </a:solidFill>
@@ -29345,51 +29358,123 @@
                     <a:p>
                       <a:pPr algn="ctr"/>
                       <a:r>
+                        <a:rPr lang="en-US" altLang="ko-KR" sz="1100" b="1" dirty="0">
+                          <a:solidFill>
+                            <a:srgbClr val="FFFFFF"/>
+                          </a:solidFill>
+                        </a:rPr>
+                        <a:t>SE</a:t>
+                      </a:r>
+                    </a:p>
+                    <a:p>
+                      <a:pPr algn="ctr"/>
+                      <a:r>
+                        <a:rPr lang="en-US" altLang="ko-KR" sz="1100" b="1" dirty="0">
+                          <a:solidFill>
+                            <a:srgbClr val="FFFFFF"/>
+                          </a:solidFill>
+                        </a:rPr>
+                        <a:t>(</a:t>
+                      </a:r>
+                      <a:r>
+                        <a:rPr lang="ko-KR" altLang="en-US" sz="1100" b="1" dirty="0">
+                          <a:solidFill>
+                            <a:srgbClr val="FFFFFF"/>
+                          </a:solidFill>
+                        </a:rPr>
+                        <a:t>표준 오차</a:t>
+                      </a:r>
+                      <a:r>
+                        <a:rPr lang="en-US" altLang="ko-KR" sz="1100" b="1" dirty="0">
+                          <a:solidFill>
+                            <a:srgbClr val="FFFFFF"/>
+                          </a:solidFill>
+                        </a:rPr>
+                        <a:t>)</a:t>
+                      </a:r>
+                      <a:endParaRPr sz="1100" b="1" dirty="0">
+                        <a:solidFill>
+                          <a:srgbClr val="FFFFFF"/>
+                        </a:solidFill>
+                      </a:endParaRPr>
+                    </a:p>
+                  </a:txBody>
+                  <a:tcPr anchor="ctr">
+                    <a:solidFill>
+                      <a:srgbClr val="1A355E"/>
+                    </a:solidFill>
+                  </a:tcPr>
+                </a:tc>
+                <a:tc>
+                  <a:txBody>
+                    <a:bodyPr/>
+                    <a:lstStyle/>
+                    <a:p>
+                      <a:pPr algn="ctr"/>
+                      <a:r>
+                        <a:rPr lang="en-US" sz="1100" b="1" dirty="0">
+                          <a:solidFill>
+                            <a:srgbClr val="FFFFFF"/>
+                          </a:solidFill>
+                        </a:rPr>
+                        <a:t>T</a:t>
+                      </a:r>
+                    </a:p>
+                    <a:p>
+                      <a:pPr algn="ctr"/>
+                      <a:r>
+                        <a:rPr lang="en-US" sz="1100" b="1" dirty="0">
+                          <a:solidFill>
+                            <a:srgbClr val="FFFFFF"/>
+                          </a:solidFill>
+                        </a:rPr>
+                        <a:t>(</a:t>
+                      </a:r>
+                      <a:r>
+                        <a:rPr lang="el-GR" altLang="ko-KR" sz="1100" b="1" dirty="0">
+                          <a:solidFill>
+                            <a:srgbClr val="FFFFFF"/>
+                          </a:solidFill>
+                        </a:rPr>
+                        <a:t>β </a:t>
+                      </a:r>
+                      <a:r>
+                        <a:rPr lang="en-US" altLang="ko-KR" sz="1100" b="1" dirty="0">
+                          <a:solidFill>
+                            <a:srgbClr val="FFFFFF"/>
+                          </a:solidFill>
+                        </a:rPr>
+                        <a:t>/SE</a:t>
+                      </a:r>
+                      <a:r>
+                        <a:rPr lang="en-US" sz="1100" b="1" dirty="0">
+                          <a:solidFill>
+                            <a:srgbClr val="FFFFFF"/>
+                          </a:solidFill>
+                        </a:rPr>
+                        <a:t>)</a:t>
+                      </a:r>
+                      <a:endParaRPr sz="1100" b="1" dirty="0">
+                        <a:solidFill>
+                          <a:srgbClr val="FFFFFF"/>
+                        </a:solidFill>
+                      </a:endParaRPr>
+                    </a:p>
+                  </a:txBody>
+                  <a:tcPr anchor="ctr">
+                    <a:solidFill>
+                      <a:srgbClr val="1A355E"/>
+                    </a:solidFill>
+                  </a:tcPr>
+                </a:tc>
+                <a:tc>
+                  <a:txBody>
+                    <a:bodyPr/>
+                    <a:lstStyle/>
+                    <a:p>
+                      <a:pPr algn="ctr"/>
+                      <a:r>
                         <a:rPr sz="1100" b="1" dirty="0">
-                          <a:solidFill>
-                            <a:srgbClr val="FFFFFF"/>
-                          </a:solidFill>
-                        </a:rPr>
-                        <a:t>SE</a:t>
-                      </a:r>
-                    </a:p>
-                  </a:txBody>
-                  <a:tcPr anchor="ctr">
-                    <a:solidFill>
-                      <a:srgbClr val="1A355E"/>
-                    </a:solidFill>
-                  </a:tcPr>
-                </a:tc>
-                <a:tc>
-                  <a:txBody>
-                    <a:bodyPr/>
-                    <a:lstStyle/>
-                    <a:p>
-                      <a:pPr algn="ctr"/>
-                      <a:r>
-                        <a:rPr sz="1100" b="1">
-                          <a:solidFill>
-                            <a:srgbClr val="FFFFFF"/>
-                          </a:solidFill>
-                        </a:rPr>
-                        <a:t>t</a:t>
-                      </a:r>
-                    </a:p>
-                  </a:txBody>
-                  <a:tcPr anchor="ctr">
-                    <a:solidFill>
-                      <a:srgbClr val="1A355E"/>
-                    </a:solidFill>
-                  </a:tcPr>
-                </a:tc>
-                <a:tc>
-                  <a:txBody>
-                    <a:bodyPr/>
-                    <a:lstStyle/>
-                    <a:p>
-                      <a:pPr algn="ctr"/>
-                      <a:r>
-                        <a:rPr sz="1100" b="1">
                           <a:solidFill>
                             <a:srgbClr val="FFFFFF"/>
                           </a:solidFill>
@@ -29506,7 +29591,7 @@
                     <a:p>
                       <a:pPr algn="ctr"/>
                       <a:r>
-                        <a:rPr sz="1100">
+                        <a:rPr sz="1100" dirty="0">
                           <a:solidFill>
                             <a:srgbClr val="1A1A2E"/>
                           </a:solidFill>
@@ -29528,13 +29613,18 @@
                     <a:p>
                       <a:pPr algn="ctr"/>
                       <a:r>
-                        <a:rPr sz="1100">
-                          <a:solidFill>
-                            <a:srgbClr val="1A1A2E"/>
-                          </a:solidFill>
-                        </a:rPr>
-                        <a:t>0.0000e+00</a:t>
-                      </a:r>
+                        <a:rPr lang="en-US" sz="1100" dirty="0">
+                          <a:solidFill>
+                            <a:srgbClr val="1A1A2E"/>
+                          </a:solidFill>
+                        </a:rPr>
+                        <a:t>&lt; 0.001</a:t>
+                      </a:r>
+                      <a:endParaRPr sz="1100" dirty="0">
+                        <a:solidFill>
+                          <a:srgbClr val="1A1A2E"/>
+                        </a:solidFill>
+                      </a:endParaRPr>
                     </a:p>
                   </a:txBody>
                   <a:tcPr anchor="ctr">
@@ -29667,13 +29757,18 @@
                     <a:p>
                       <a:pPr algn="ctr"/>
                       <a:r>
-                        <a:rPr sz="1100">
-                          <a:solidFill>
-                            <a:srgbClr val="1A1A2E"/>
-                          </a:solidFill>
-                        </a:rPr>
-                        <a:t>0.0000e+00</a:t>
-                      </a:r>
+                        <a:rPr lang="en-US" altLang="ko-KR" sz="1100" dirty="0">
+                          <a:solidFill>
+                            <a:srgbClr val="1A1A2E"/>
+                          </a:solidFill>
+                        </a:rPr>
+                        <a:t>&lt; 0.001</a:t>
+                      </a:r>
+                      <a:endParaRPr sz="1100" dirty="0">
+                        <a:solidFill>
+                          <a:srgbClr val="1A1A2E"/>
+                        </a:solidFill>
+                      </a:endParaRPr>
                     </a:p>
                   </a:txBody>
                   <a:tcPr anchor="ctr">
@@ -29806,13 +29901,18 @@
                     <a:p>
                       <a:pPr algn="ctr"/>
                       <a:r>
-                        <a:rPr sz="1100">
-                          <a:solidFill>
-                            <a:srgbClr val="1A1A2E"/>
-                          </a:solidFill>
-                        </a:rPr>
-                        <a:t>0.0000e+00</a:t>
-                      </a:r>
+                        <a:rPr lang="en-US" altLang="ko-KR" sz="1100" dirty="0">
+                          <a:solidFill>
+                            <a:srgbClr val="1A1A2E"/>
+                          </a:solidFill>
+                        </a:rPr>
+                        <a:t>&lt; 0.001</a:t>
+                      </a:r>
+                      <a:endParaRPr sz="1100" dirty="0">
+                        <a:solidFill>
+                          <a:srgbClr val="1A1A2E"/>
+                        </a:solidFill>
+                      </a:endParaRPr>
                     </a:p>
                   </a:txBody>
                   <a:tcPr anchor="ctr">
@@ -30223,13 +30323,18 @@
                     <a:p>
                       <a:pPr algn="ctr"/>
                       <a:r>
-                        <a:rPr sz="1100" dirty="0">
-                          <a:solidFill>
-                            <a:srgbClr val="1A1A2E"/>
-                          </a:solidFill>
-                        </a:rPr>
-                        <a:t>0.0000e+00</a:t>
-                      </a:r>
+                        <a:rPr lang="en-US" altLang="ko-KR" sz="1100" dirty="0">
+                          <a:solidFill>
+                            <a:srgbClr val="1A1A2E"/>
+                          </a:solidFill>
+                        </a:rPr>
+                        <a:t>&lt; 0.001</a:t>
+                      </a:r>
+                      <a:endParaRPr sz="1100" dirty="0">
+                        <a:solidFill>
+                          <a:srgbClr val="1A1A2E"/>
+                        </a:solidFill>
+                      </a:endParaRPr>
                     </a:p>
                   </a:txBody>
                   <a:tcPr anchor="ctr">
@@ -30262,7 +30367,7 @@
         </p:nvSpPr>
         <p:spPr>
           <a:xfrm>
-            <a:off x="1056000" y="4073237"/>
+            <a:off x="1056000" y="4155949"/>
             <a:ext cx="10080000" cy="246221"/>
           </a:xfrm>
           <a:prstGeom prst="rect">
@@ -30539,15 +30644,11 @@
             </a:r>
             <a:r>
               <a:rPr lang="en-US" altLang="ko-KR" dirty="0"/>
-              <a:t>(</a:t>
-            </a:r>
-            <a:r>
-              <a:rPr lang="ko-KR" altLang="en-US" dirty="0" err="1"/>
-              <a:t>이홍선</a:t>
+              <a:t>(Feedback</a:t>
             </a:r>
             <a:r>
               <a:rPr lang="ko-KR" altLang="en-US" dirty="0"/>
-              <a:t> 교수님 피드백 참고</a:t>
+              <a:t> 반영</a:t>
             </a:r>
             <a:r>
               <a:rPr lang="en-US" altLang="ko-KR" dirty="0"/>
@@ -30564,18 +30665,27 @@
           <a:p>
             <a:r>
               <a:rPr lang="en-US" altLang="ko-KR" dirty="0"/>
-              <a:t>Multivariable Analysis </a:t>
+              <a:t>Multivariable Analysis (</a:t>
             </a:r>
             <a:r>
               <a:rPr lang="ko-KR" altLang="en-US" dirty="0"/>
-              <a:t>진행</a:t>
-            </a:r>
-            <a:endParaRPr lang="en-US" altLang="ko-KR" dirty="0"/>
-          </a:p>
-          <a:p>
+              <a:t>강남</a:t>
+            </a:r>
+            <a:r>
+              <a:rPr lang="en-US" altLang="ko-KR" dirty="0"/>
+              <a:t>, </a:t>
+            </a:r>
             <a:r>
               <a:rPr lang="ko-KR" altLang="en-US" dirty="0"/>
-              <a:t>강남 데이터셋과 신촌 데이터셋 비교</a:t>
+              <a:t>신촌</a:t>
+            </a:r>
+            <a:r>
+              <a:rPr lang="en-US" altLang="ko-KR" dirty="0"/>
+              <a:t>)</a:t>
+            </a:r>
+            <a:r>
+              <a:rPr lang="ko-KR" altLang="en-US" dirty="0"/>
+              <a:t> 비교</a:t>
             </a:r>
             <a:endParaRPr lang="en-US" altLang="ko-KR" dirty="0"/>
           </a:p>
@@ -31627,6 +31737,171 @@
           </a:graphicData>
         </a:graphic>
       </p:graphicFrame>
+      <p:sp>
+        <p:nvSpPr>
+          <p:cNvPr id="8" name="TextBox 7">
+            <a:extLst>
+              <a:ext uri="{FF2B5EF4-FFF2-40B4-BE49-F238E27FC236}">
+                <a16:creationId xmlns:a16="http://schemas.microsoft.com/office/drawing/2014/main" id="{D1DBFA0A-83E4-4F16-8464-20769B02D75A}"/>
+              </a:ext>
+            </a:extLst>
+          </p:cNvPr>
+          <p:cNvSpPr txBox="1"/>
+          <p:nvPr/>
+        </p:nvSpPr>
+        <p:spPr>
+          <a:xfrm>
+            <a:off x="1516582" y="2930143"/>
+            <a:ext cx="9158835" cy="292388"/>
+          </a:xfrm>
+          <a:prstGeom prst="rect">
+            <a:avLst/>
+          </a:prstGeom>
+          <a:noFill/>
+        </p:spPr>
+        <p:txBody>
+          <a:bodyPr wrap="square">
+            <a:spAutoFit/>
+          </a:bodyPr>
+          <a:lstStyle/>
+          <a:p>
+            <a:pPr algn="l"/>
+            <a:r>
+              <a:rPr sz="1300" b="1" i="0" dirty="0">
+                <a:solidFill>
+                  <a:srgbClr val="2E75B6"/>
+                </a:solidFill>
+              </a:rPr>
+              <a:t>AEC </a:t>
+            </a:r>
+            <a:r>
+              <a:rPr sz="1300" b="1" i="0" dirty="0" err="1">
+                <a:solidFill>
+                  <a:srgbClr val="2E75B6"/>
+                </a:solidFill>
+              </a:rPr>
+              <a:t>특징</a:t>
+            </a:r>
+            <a:r>
+              <a:rPr sz="1300" b="1" i="0" dirty="0">
+                <a:solidFill>
+                  <a:srgbClr val="2E75B6"/>
+                </a:solidFill>
+              </a:rPr>
+              <a:t> </a:t>
+            </a:r>
+            <a:r>
+              <a:rPr sz="1300" b="1" i="0" dirty="0" err="1">
+                <a:solidFill>
+                  <a:srgbClr val="2E75B6"/>
+                </a:solidFill>
+              </a:rPr>
+              <a:t>추가</a:t>
+            </a:r>
+            <a:r>
+              <a:rPr sz="1300" b="1" i="0" dirty="0">
+                <a:solidFill>
+                  <a:srgbClr val="2E75B6"/>
+                </a:solidFill>
+              </a:rPr>
+              <a:t>(Case1→2)로 R² +15.4% </a:t>
+            </a:r>
+            <a:r>
+              <a:rPr sz="1300" b="1" i="0" dirty="0" err="1">
+                <a:solidFill>
+                  <a:srgbClr val="2E75B6"/>
+                </a:solidFill>
+              </a:rPr>
+              <a:t>향상</a:t>
+            </a:r>
+            <a:r>
+              <a:rPr sz="1300" b="1" i="0" dirty="0">
+                <a:solidFill>
+                  <a:srgbClr val="2E75B6"/>
+                </a:solidFill>
+              </a:rPr>
+              <a:t>  |  CT </a:t>
+            </a:r>
+            <a:r>
+              <a:rPr sz="1300" b="1" i="0" dirty="0" err="1">
+                <a:solidFill>
+                  <a:srgbClr val="2E75B6"/>
+                </a:solidFill>
+              </a:rPr>
+              <a:t>모델명</a:t>
+            </a:r>
+            <a:r>
+              <a:rPr sz="1300" b="1" i="0" dirty="0">
+                <a:solidFill>
+                  <a:srgbClr val="2E75B6"/>
+                </a:solidFill>
+              </a:rPr>
+              <a:t>/</a:t>
+            </a:r>
+            <a:r>
+              <a:rPr sz="1300" b="1" i="0" dirty="0" err="1">
+                <a:solidFill>
+                  <a:srgbClr val="2E75B6"/>
+                </a:solidFill>
+              </a:rPr>
+              <a:t>kVp</a:t>
+            </a:r>
+            <a:r>
+              <a:rPr sz="1300" b="1" i="0" dirty="0">
+                <a:solidFill>
+                  <a:srgbClr val="2E75B6"/>
+                </a:solidFill>
+              </a:rPr>
+              <a:t> </a:t>
+            </a:r>
+            <a:r>
+              <a:rPr sz="1300" b="1" i="0" dirty="0" err="1">
+                <a:solidFill>
+                  <a:srgbClr val="2E75B6"/>
+                </a:solidFill>
+              </a:rPr>
+              <a:t>추가</a:t>
+            </a:r>
+            <a:r>
+              <a:rPr sz="1300" b="1" i="0" dirty="0">
+                <a:solidFill>
+                  <a:srgbClr val="2E75B6"/>
+                </a:solidFill>
+              </a:rPr>
+              <a:t>(Case2→3)로 </a:t>
+            </a:r>
+            <a:r>
+              <a:rPr sz="1300" b="1" i="0" dirty="0" err="1">
+                <a:solidFill>
+                  <a:srgbClr val="2E75B6"/>
+                </a:solidFill>
+              </a:rPr>
+              <a:t>추가</a:t>
+            </a:r>
+            <a:r>
+              <a:rPr sz="1300" b="1" i="0" dirty="0">
+                <a:solidFill>
+                  <a:srgbClr val="2E75B6"/>
+                </a:solidFill>
+              </a:rPr>
+              <a:t> +3.8% </a:t>
+            </a:r>
+            <a:r>
+              <a:rPr sz="1300" b="1" i="0" dirty="0" err="1">
+                <a:solidFill>
+                  <a:srgbClr val="2E75B6"/>
+                </a:solidFill>
+              </a:rPr>
+              <a:t>향상</a:t>
+            </a:r>
+            <a:endParaRPr sz="1300" b="1" i="0" dirty="0">
+              <a:solidFill>
+                <a:srgbClr val="2E75B6"/>
+              </a:solidFill>
+            </a:endParaRPr>
+          </a:p>
+        </p:txBody>
+      </p:sp>
     </p:spTree>
     <p:extLst>
       <p:ext uri="{BB962C8B-B14F-4D97-AF65-F5344CB8AC3E}">
@@ -31775,14 +32050,14 @@
           <p:nvPr>
             <p:extLst>
               <p:ext uri="{D42A27DB-BD31-4B8C-83A1-F6EECF244321}">
-                <p14:modId xmlns:p14="http://schemas.microsoft.com/office/powerpoint/2010/main" val="3817336932"/>
+                <p14:modId xmlns:p14="http://schemas.microsoft.com/office/powerpoint/2010/main" val="26942470"/>
               </p:ext>
             </p:extLst>
           </p:nvPr>
         </p:nvGraphicFramePr>
         <p:xfrm>
           <a:off x="1056000" y="1652395"/>
-          <a:ext cx="10080000" cy="2420842"/>
+          <a:ext cx="10080000" cy="2503554"/>
         </p:xfrm>
         <a:graphic>
           <a:graphicData uri="http://schemas.openxmlformats.org/drawingml/2006/table">
@@ -31869,13 +32144,26 @@
                     <a:p>
                       <a:pPr algn="ctr"/>
                       <a:r>
-                        <a:rPr sz="1100" b="1">
+                        <a:rPr sz="1100" b="1" dirty="0">
                           <a:solidFill>
                             <a:srgbClr val="FFFFFF"/>
                           </a:solidFill>
                         </a:rPr>
-                        <a:t>β 계수</a:t>
-                      </a:r>
+                        <a:t>β </a:t>
+                      </a:r>
+                      <a:r>
+                        <a:rPr sz="1100" b="1" dirty="0" err="1">
+                          <a:solidFill>
+                            <a:srgbClr val="FFFFFF"/>
+                          </a:solidFill>
+                        </a:rPr>
+                        <a:t>계수</a:t>
+                      </a:r>
+                      <a:endParaRPr sz="1100" b="1" dirty="0">
+                        <a:solidFill>
+                          <a:srgbClr val="FFFFFF"/>
+                        </a:solidFill>
+                      </a:endParaRPr>
                     </a:p>
                   </a:txBody>
                   <a:tcPr anchor="ctr">
@@ -31891,7 +32179,7 @@
                     <a:p>
                       <a:pPr algn="ctr"/>
                       <a:r>
-                        <a:rPr sz="1100" b="1">
+                        <a:rPr sz="1100" b="1" dirty="0">
                           <a:solidFill>
                             <a:srgbClr val="FFFFFF"/>
                           </a:solidFill>
@@ -31913,51 +32201,123 @@
                     <a:p>
                       <a:pPr algn="ctr"/>
                       <a:r>
+                        <a:rPr lang="en-US" altLang="ko-KR" sz="1100" b="1" dirty="0">
+                          <a:solidFill>
+                            <a:srgbClr val="FFFFFF"/>
+                          </a:solidFill>
+                        </a:rPr>
+                        <a:t>SE</a:t>
+                      </a:r>
+                    </a:p>
+                    <a:p>
+                      <a:pPr algn="ctr"/>
+                      <a:r>
+                        <a:rPr lang="en-US" altLang="ko-KR" sz="1100" b="1" dirty="0">
+                          <a:solidFill>
+                            <a:srgbClr val="FFFFFF"/>
+                          </a:solidFill>
+                        </a:rPr>
+                        <a:t>(</a:t>
+                      </a:r>
+                      <a:r>
+                        <a:rPr lang="ko-KR" altLang="en-US" sz="1100" b="1" dirty="0">
+                          <a:solidFill>
+                            <a:srgbClr val="FFFFFF"/>
+                          </a:solidFill>
+                        </a:rPr>
+                        <a:t>표준 오차</a:t>
+                      </a:r>
+                      <a:r>
+                        <a:rPr lang="en-US" altLang="ko-KR" sz="1100" b="1" dirty="0">
+                          <a:solidFill>
+                            <a:srgbClr val="FFFFFF"/>
+                          </a:solidFill>
+                        </a:rPr>
+                        <a:t>)</a:t>
+                      </a:r>
+                      <a:endParaRPr sz="1100" b="1" dirty="0">
+                        <a:solidFill>
+                          <a:srgbClr val="FFFFFF"/>
+                        </a:solidFill>
+                      </a:endParaRPr>
+                    </a:p>
+                  </a:txBody>
+                  <a:tcPr anchor="ctr">
+                    <a:solidFill>
+                      <a:srgbClr val="1A355E"/>
+                    </a:solidFill>
+                  </a:tcPr>
+                </a:tc>
+                <a:tc>
+                  <a:txBody>
+                    <a:bodyPr/>
+                    <a:lstStyle/>
+                    <a:p>
+                      <a:pPr algn="ctr"/>
+                      <a:r>
+                        <a:rPr lang="en-US" sz="1100" b="1" dirty="0">
+                          <a:solidFill>
+                            <a:srgbClr val="FFFFFF"/>
+                          </a:solidFill>
+                        </a:rPr>
+                        <a:t>T</a:t>
+                      </a:r>
+                    </a:p>
+                    <a:p>
+                      <a:pPr algn="ctr"/>
+                      <a:r>
+                        <a:rPr lang="en-US" sz="1100" b="1" dirty="0">
+                          <a:solidFill>
+                            <a:srgbClr val="FFFFFF"/>
+                          </a:solidFill>
+                        </a:rPr>
+                        <a:t>(</a:t>
+                      </a:r>
+                      <a:r>
+                        <a:rPr lang="el-GR" altLang="ko-KR" sz="1100" b="1" dirty="0">
+                          <a:solidFill>
+                            <a:srgbClr val="FFFFFF"/>
+                          </a:solidFill>
+                        </a:rPr>
+                        <a:t>β </a:t>
+                      </a:r>
+                      <a:r>
+                        <a:rPr lang="en-US" altLang="ko-KR" sz="1100" b="1" dirty="0">
+                          <a:solidFill>
+                            <a:srgbClr val="FFFFFF"/>
+                          </a:solidFill>
+                        </a:rPr>
+                        <a:t>/SE</a:t>
+                      </a:r>
+                      <a:r>
+                        <a:rPr lang="en-US" sz="1100" b="1" dirty="0">
+                          <a:solidFill>
+                            <a:srgbClr val="FFFFFF"/>
+                          </a:solidFill>
+                        </a:rPr>
+                        <a:t>)</a:t>
+                      </a:r>
+                      <a:endParaRPr sz="1100" b="1" dirty="0">
+                        <a:solidFill>
+                          <a:srgbClr val="FFFFFF"/>
+                        </a:solidFill>
+                      </a:endParaRPr>
+                    </a:p>
+                  </a:txBody>
+                  <a:tcPr anchor="ctr">
+                    <a:solidFill>
+                      <a:srgbClr val="1A355E"/>
+                    </a:solidFill>
+                  </a:tcPr>
+                </a:tc>
+                <a:tc>
+                  <a:txBody>
+                    <a:bodyPr/>
+                    <a:lstStyle/>
+                    <a:p>
+                      <a:pPr algn="ctr"/>
+                      <a:r>
                         <a:rPr sz="1100" b="1" dirty="0">
-                          <a:solidFill>
-                            <a:srgbClr val="FFFFFF"/>
-                          </a:solidFill>
-                        </a:rPr>
-                        <a:t>SE</a:t>
-                      </a:r>
-                    </a:p>
-                  </a:txBody>
-                  <a:tcPr anchor="ctr">
-                    <a:solidFill>
-                      <a:srgbClr val="1A355E"/>
-                    </a:solidFill>
-                  </a:tcPr>
-                </a:tc>
-                <a:tc>
-                  <a:txBody>
-                    <a:bodyPr/>
-                    <a:lstStyle/>
-                    <a:p>
-                      <a:pPr algn="ctr"/>
-                      <a:r>
-                        <a:rPr sz="1100" b="1">
-                          <a:solidFill>
-                            <a:srgbClr val="FFFFFF"/>
-                          </a:solidFill>
-                        </a:rPr>
-                        <a:t>t</a:t>
-                      </a:r>
-                    </a:p>
-                  </a:txBody>
-                  <a:tcPr anchor="ctr">
-                    <a:solidFill>
-                      <a:srgbClr val="1A355E"/>
-                    </a:solidFill>
-                  </a:tcPr>
-                </a:tc>
-                <a:tc>
-                  <a:txBody>
-                    <a:bodyPr/>
-                    <a:lstStyle/>
-                    <a:p>
-                      <a:pPr algn="ctr"/>
-                      <a:r>
-                        <a:rPr sz="1100" b="1">
                           <a:solidFill>
                             <a:srgbClr val="FFFFFF"/>
                           </a:solidFill>
@@ -32096,12 +32456,12 @@
                     <a:p>
                       <a:pPr algn="ctr"/>
                       <a:r>
-                        <a:rPr sz="1100">
-                          <a:solidFill>
-                            <a:srgbClr val="1A1A2E"/>
-                          </a:solidFill>
-                        </a:rPr>
-                        <a:t>0.0000e+00</a:t>
+                        <a:rPr lang="en-US" altLang="ko-KR" sz="1100" dirty="0">
+                          <a:solidFill>
+                            <a:srgbClr val="1A1A2E"/>
+                          </a:solidFill>
+                        </a:rPr>
+                        <a:t>&lt; 0.001</a:t>
                       </a:r>
                     </a:p>
                   </a:txBody>
@@ -32235,12 +32595,12 @@
                     <a:p>
                       <a:pPr algn="ctr"/>
                       <a:r>
-                        <a:rPr sz="1100">
-                          <a:solidFill>
-                            <a:srgbClr val="1A1A2E"/>
-                          </a:solidFill>
-                        </a:rPr>
-                        <a:t>0.0000e+00</a:t>
+                        <a:rPr lang="en-US" altLang="ko-KR" sz="1100" dirty="0">
+                          <a:solidFill>
+                            <a:srgbClr val="1A1A2E"/>
+                          </a:solidFill>
+                        </a:rPr>
+                        <a:t>&lt; 0.001</a:t>
                       </a:r>
                     </a:p>
                   </a:txBody>
@@ -32374,12 +32734,12 @@
                     <a:p>
                       <a:pPr algn="ctr"/>
                       <a:r>
-                        <a:rPr sz="1100">
-                          <a:solidFill>
-                            <a:srgbClr val="1A1A2E"/>
-                          </a:solidFill>
-                        </a:rPr>
-                        <a:t>0.0000e+00</a:t>
+                        <a:rPr lang="en-US" altLang="ko-KR" sz="1100" dirty="0">
+                          <a:solidFill>
+                            <a:srgbClr val="1A1A2E"/>
+                          </a:solidFill>
+                        </a:rPr>
+                        <a:t>&lt; 0.001</a:t>
                       </a:r>
                     </a:p>
                   </a:txBody>
@@ -32830,7 +33190,7 @@
         </p:nvSpPr>
         <p:spPr>
           <a:xfrm>
-            <a:off x="1056000" y="4073237"/>
+            <a:off x="1056000" y="4155949"/>
             <a:ext cx="10080000" cy="246221"/>
           </a:xfrm>
           <a:prstGeom prst="rect">
@@ -32950,17 +33310,17 @@
               <a:t>)  |  </a:t>
             </a:r>
             <a:r>
-              <a:rPr sz="1000" b="0" i="1" dirty="0" err="1">
+              <a:rPr lang="el-GR" altLang="ko-KR" sz="1000" i="1" dirty="0">
                 <a:solidFill>
-                  <a:srgbClr val="FF7F27"/>
+                  <a:schemeClr val="accent2"/>
                 </a:solidFill>
               </a:rPr>
-              <a:t>표준화</a:t>
-            </a:r>
-            <a:r>
-              <a:rPr sz="1000" b="0" i="1" dirty="0">
+              <a:t>β</a:t>
+            </a:r>
+            <a:r>
+              <a:rPr sz="1000" i="1" dirty="0">
                 <a:solidFill>
-                  <a:srgbClr val="FF7F27"/>
+                  <a:schemeClr val="accent2"/>
                 </a:solidFill>
               </a:rPr>
               <a:t> </a:t>
@@ -33191,7 +33551,7 @@
           <p:nvPr>
             <p:extLst>
               <p:ext uri="{D42A27DB-BD31-4B8C-83A1-F6EECF244321}">
-                <p14:modId xmlns:p14="http://schemas.microsoft.com/office/powerpoint/2010/main" val="1551515486"/>
+                <p14:modId xmlns:p14="http://schemas.microsoft.com/office/powerpoint/2010/main" val="1608127861"/>
               </p:ext>
             </p:extLst>
           </p:nvPr>
@@ -34014,6 +34374,171 @@
           </a:graphicData>
         </a:graphic>
       </p:graphicFrame>
+      <p:sp>
+        <p:nvSpPr>
+          <p:cNvPr id="7" name="TextBox 6">
+            <a:extLst>
+              <a:ext uri="{FF2B5EF4-FFF2-40B4-BE49-F238E27FC236}">
+                <a16:creationId xmlns:a16="http://schemas.microsoft.com/office/drawing/2014/main" id="{A8A5A128-A194-4E5F-ACEF-30B3E6B5196F}"/>
+              </a:ext>
+            </a:extLst>
+          </p:cNvPr>
+          <p:cNvSpPr txBox="1"/>
+          <p:nvPr/>
+        </p:nvSpPr>
+        <p:spPr>
+          <a:xfrm>
+            <a:off x="1516582" y="2930143"/>
+            <a:ext cx="9158835" cy="292388"/>
+          </a:xfrm>
+          <a:prstGeom prst="rect">
+            <a:avLst/>
+          </a:prstGeom>
+          <a:noFill/>
+        </p:spPr>
+        <p:txBody>
+          <a:bodyPr wrap="square">
+            <a:spAutoFit/>
+          </a:bodyPr>
+          <a:lstStyle/>
+          <a:p>
+            <a:pPr algn="l"/>
+            <a:r>
+              <a:rPr sz="1300" b="1" i="0" dirty="0">
+                <a:solidFill>
+                  <a:srgbClr val="2E75B6"/>
+                </a:solidFill>
+              </a:rPr>
+              <a:t>AEC </a:t>
+            </a:r>
+            <a:r>
+              <a:rPr sz="1300" b="1" i="0" dirty="0" err="1">
+                <a:solidFill>
+                  <a:srgbClr val="2E75B6"/>
+                </a:solidFill>
+              </a:rPr>
+              <a:t>특징</a:t>
+            </a:r>
+            <a:r>
+              <a:rPr sz="1300" b="1" i="0" dirty="0">
+                <a:solidFill>
+                  <a:srgbClr val="2E75B6"/>
+                </a:solidFill>
+              </a:rPr>
+              <a:t> </a:t>
+            </a:r>
+            <a:r>
+              <a:rPr sz="1300" b="1" i="0" dirty="0" err="1">
+                <a:solidFill>
+                  <a:srgbClr val="2E75B6"/>
+                </a:solidFill>
+              </a:rPr>
+              <a:t>추가</a:t>
+            </a:r>
+            <a:r>
+              <a:rPr sz="1300" b="1" i="0" dirty="0">
+                <a:solidFill>
+                  <a:srgbClr val="2E75B6"/>
+                </a:solidFill>
+              </a:rPr>
+              <a:t>(Case1→2)로 R² +5.3% </a:t>
+            </a:r>
+            <a:r>
+              <a:rPr sz="1300" b="1" i="0" dirty="0" err="1">
+                <a:solidFill>
+                  <a:srgbClr val="2E75B6"/>
+                </a:solidFill>
+              </a:rPr>
+              <a:t>향상</a:t>
+            </a:r>
+            <a:r>
+              <a:rPr sz="1300" b="1" i="0" dirty="0">
+                <a:solidFill>
+                  <a:srgbClr val="2E75B6"/>
+                </a:solidFill>
+              </a:rPr>
+              <a:t>  |  CT </a:t>
+            </a:r>
+            <a:r>
+              <a:rPr sz="1300" b="1" i="0" dirty="0" err="1">
+                <a:solidFill>
+                  <a:srgbClr val="2E75B6"/>
+                </a:solidFill>
+              </a:rPr>
+              <a:t>모델명</a:t>
+            </a:r>
+            <a:r>
+              <a:rPr sz="1300" b="1" i="0" dirty="0">
+                <a:solidFill>
+                  <a:srgbClr val="2E75B6"/>
+                </a:solidFill>
+              </a:rPr>
+              <a:t>/</a:t>
+            </a:r>
+            <a:r>
+              <a:rPr sz="1300" b="1" i="0" dirty="0" err="1">
+                <a:solidFill>
+                  <a:srgbClr val="2E75B6"/>
+                </a:solidFill>
+              </a:rPr>
+              <a:t>kVp</a:t>
+            </a:r>
+            <a:r>
+              <a:rPr sz="1300" b="1" i="0" dirty="0">
+                <a:solidFill>
+                  <a:srgbClr val="2E75B6"/>
+                </a:solidFill>
+              </a:rPr>
+              <a:t> </a:t>
+            </a:r>
+            <a:r>
+              <a:rPr sz="1300" b="1" i="0" dirty="0" err="1">
+                <a:solidFill>
+                  <a:srgbClr val="2E75B6"/>
+                </a:solidFill>
+              </a:rPr>
+              <a:t>추가</a:t>
+            </a:r>
+            <a:r>
+              <a:rPr sz="1300" b="1" i="0" dirty="0">
+                <a:solidFill>
+                  <a:srgbClr val="2E75B6"/>
+                </a:solidFill>
+              </a:rPr>
+              <a:t>(Case2→3)로 </a:t>
+            </a:r>
+            <a:r>
+              <a:rPr sz="1300" b="1" i="0" dirty="0" err="1">
+                <a:solidFill>
+                  <a:srgbClr val="2E75B6"/>
+                </a:solidFill>
+              </a:rPr>
+              <a:t>추가</a:t>
+            </a:r>
+            <a:r>
+              <a:rPr sz="1300" b="1" i="0" dirty="0">
+                <a:solidFill>
+                  <a:srgbClr val="2E75B6"/>
+                </a:solidFill>
+              </a:rPr>
+              <a:t> +7.7% </a:t>
+            </a:r>
+            <a:r>
+              <a:rPr sz="1300" b="1" i="0" dirty="0" err="1">
+                <a:solidFill>
+                  <a:srgbClr val="2E75B6"/>
+                </a:solidFill>
+              </a:rPr>
+              <a:t>향상</a:t>
+            </a:r>
+            <a:endParaRPr sz="1300" b="1" i="0" dirty="0">
+              <a:solidFill>
+                <a:srgbClr val="2E75B6"/>
+              </a:solidFill>
+            </a:endParaRPr>
+          </a:p>
+        </p:txBody>
+      </p:sp>
     </p:spTree>
     <p:extLst>
       <p:ext uri="{BB962C8B-B14F-4D97-AF65-F5344CB8AC3E}">
@@ -35681,7 +36206,7 @@
         </p:blipFill>
         <p:spPr>
           <a:xfrm>
-            <a:off x="3352799" y="3434600"/>
+            <a:off x="3352799" y="3612403"/>
             <a:ext cx="5486400" cy="2777067"/>
           </a:xfrm>
           <a:prstGeom prst="rect">
@@ -35704,14 +36229,14 @@
           <p:nvPr>
             <p:extLst>
               <p:ext uri="{D42A27DB-BD31-4B8C-83A1-F6EECF244321}">
-                <p14:modId xmlns:p14="http://schemas.microsoft.com/office/powerpoint/2010/main" val="2551983333"/>
+                <p14:modId xmlns:p14="http://schemas.microsoft.com/office/powerpoint/2010/main" val="2670996520"/>
               </p:ext>
             </p:extLst>
           </p:nvPr>
         </p:nvGraphicFramePr>
         <p:xfrm>
           <a:off x="1516582" y="1625599"/>
-          <a:ext cx="9158835" cy="1304544"/>
+          <a:ext cx="9158835" cy="1597152"/>
         </p:xfrm>
         <a:graphic>
           <a:graphicData uri="http://schemas.openxmlformats.org/drawingml/2006/table">
@@ -36370,7 +36895,7 @@
                     <a:p>
                       <a:pPr algn="ctr"/>
                       <a:r>
-                        <a:rPr sz="1200">
+                        <a:rPr sz="1200" dirty="0">
                           <a:solidFill>
                             <a:srgbClr val="1A1A2E"/>
                           </a:solidFill>
@@ -36520,6 +37045,209 @@
                 <a:extLst>
                   <a:ext uri="{0D108BD9-81ED-4DB2-BD59-A6C34878D82A}">
                     <a16:rowId xmlns:a16="http://schemas.microsoft.com/office/drawing/2014/main" val="10003"/>
+                  </a:ext>
+                </a:extLst>
+              </a:tr>
+              <a:tr h="292608">
+                <a:tc>
+                  <a:txBody>
+                    <a:bodyPr/>
+                    <a:lstStyle/>
+                    <a:p>
+                      <a:pPr algn="ctr"/>
+                      <a:r>
+                        <a:rPr sz="1200" dirty="0">
+                          <a:solidFill>
+                            <a:srgbClr val="1A1A2E"/>
+                          </a:solidFill>
+                        </a:rPr>
+                        <a:t>HL p-value</a:t>
+                      </a:r>
+                    </a:p>
+                  </a:txBody>
+                  <a:tcPr anchor="ctr">
+                    <a:solidFill>
+                      <a:srgbClr val="FFFFFF"/>
+                    </a:solidFill>
+                  </a:tcPr>
+                </a:tc>
+                <a:tc>
+                  <a:txBody>
+                    <a:bodyPr/>
+                    <a:lstStyle/>
+                    <a:p>
+                      <a:pPr algn="ctr"/>
+                      <a:r>
+                        <a:rPr sz="1200" dirty="0">
+                          <a:solidFill>
+                            <a:srgbClr val="1A1A2E"/>
+                          </a:solidFill>
+                        </a:rPr>
+                        <a:t>0.132</a:t>
+                      </a:r>
+                    </a:p>
+                  </a:txBody>
+                  <a:tcPr anchor="ctr">
+                    <a:solidFill>
+                      <a:srgbClr val="FFFFFF"/>
+                    </a:solidFill>
+                  </a:tcPr>
+                </a:tc>
+                <a:tc>
+                  <a:txBody>
+                    <a:bodyPr/>
+                    <a:lstStyle/>
+                    <a:p>
+                      <a:pPr algn="ctr"/>
+                      <a:r>
+                        <a:rPr sz="1200" dirty="0">
+                          <a:solidFill>
+                            <a:srgbClr val="1A1A2E"/>
+                          </a:solidFill>
+                        </a:rPr>
+                        <a:t>1.26e-03</a:t>
+                      </a:r>
+                    </a:p>
+                  </a:txBody>
+                  <a:tcPr anchor="ctr">
+                    <a:solidFill>
+                      <a:srgbClr val="FFFFFF"/>
+                    </a:solidFill>
+                  </a:tcPr>
+                </a:tc>
+                <a:tc>
+                  <a:txBody>
+                    <a:bodyPr/>
+                    <a:lstStyle/>
+                    <a:p>
+                      <a:pPr algn="ctr"/>
+                      <a:r>
+                        <a:rPr sz="1200" dirty="0">
+                          <a:solidFill>
+                            <a:srgbClr val="1A1A2E"/>
+                          </a:solidFill>
+                        </a:rPr>
+                        <a:t>0.387</a:t>
+                      </a:r>
+                    </a:p>
+                  </a:txBody>
+                  <a:tcPr anchor="ctr">
+                    <a:solidFill>
+                      <a:srgbClr val="FFFFFF"/>
+                    </a:solidFill>
+                  </a:tcPr>
+                </a:tc>
+                <a:tc>
+                  <a:txBody>
+                    <a:bodyPr/>
+                    <a:lstStyle/>
+                    <a:p>
+                      <a:pPr algn="ctr"/>
+                      <a:r>
+                        <a:rPr sz="1200" dirty="0">
+                          <a:solidFill>
+                            <a:srgbClr val="1A1A2E"/>
+                          </a:solidFill>
+                        </a:rPr>
+                        <a:t>0.728</a:t>
+                      </a:r>
+                    </a:p>
+                  </a:txBody>
+                  <a:tcPr anchor="ctr">
+                    <a:solidFill>
+                      <a:srgbClr val="FFFFFF"/>
+                    </a:solidFill>
+                  </a:tcPr>
+                </a:tc>
+                <a:tc>
+                  <a:txBody>
+                    <a:bodyPr/>
+                    <a:lstStyle/>
+                    <a:p>
+                      <a:pPr algn="ctr"/>
+                      <a:r>
+                        <a:rPr sz="1200" dirty="0" err="1">
+                          <a:solidFill>
+                            <a:srgbClr val="1A1A2E"/>
+                          </a:solidFill>
+                        </a:rPr>
+                        <a:t>보정도</a:t>
+                      </a:r>
+                      <a:r>
+                        <a:rPr sz="1200" dirty="0">
+                          <a:solidFill>
+                            <a:srgbClr val="1A1A2E"/>
+                          </a:solidFill>
+                        </a:rPr>
+                        <a:t> </a:t>
+                      </a:r>
+                      <a:r>
+                        <a:rPr sz="1200" dirty="0" err="1">
+                          <a:solidFill>
+                            <a:srgbClr val="1A1A2E"/>
+                          </a:solidFill>
+                        </a:rPr>
+                        <a:t>개선</a:t>
+                      </a:r>
+                      <a:endParaRPr sz="1200" dirty="0">
+                        <a:solidFill>
+                          <a:srgbClr val="1A1A2E"/>
+                        </a:solidFill>
+                      </a:endParaRPr>
+                    </a:p>
+                  </a:txBody>
+                  <a:tcPr anchor="ctr">
+                    <a:solidFill>
+                      <a:srgbClr val="FFFFFF"/>
+                    </a:solidFill>
+                  </a:tcPr>
+                </a:tc>
+                <a:tc>
+                  <a:txBody>
+                    <a:bodyPr/>
+                    <a:lstStyle/>
+                    <a:p>
+                      <a:pPr algn="ctr"/>
+                      <a:r>
+                        <a:rPr sz="1200" dirty="0" err="1">
+                          <a:solidFill>
+                            <a:srgbClr val="1A1A2E"/>
+                          </a:solidFill>
+                        </a:rPr>
+                        <a:t>보정도</a:t>
+                      </a:r>
+                      <a:r>
+                        <a:rPr sz="1200" dirty="0">
+                          <a:solidFill>
+                            <a:srgbClr val="1A1A2E"/>
+                          </a:solidFill>
+                        </a:rPr>
+                        <a:t> </a:t>
+                      </a:r>
+                      <a:r>
+                        <a:rPr sz="1200" dirty="0" err="1">
+                          <a:solidFill>
+                            <a:srgbClr val="1A1A2E"/>
+                          </a:solidFill>
+                        </a:rPr>
+                        <a:t>양호</a:t>
+                      </a:r>
+                      <a:endParaRPr sz="1200" dirty="0">
+                        <a:solidFill>
+                          <a:srgbClr val="1A1A2E"/>
+                        </a:solidFill>
+                      </a:endParaRPr>
+                    </a:p>
+                  </a:txBody>
+                  <a:tcPr anchor="ctr">
+                    <a:solidFill>
+                      <a:srgbClr val="FFFFFF"/>
+                    </a:solidFill>
+                  </a:tcPr>
+                </a:tc>
+                <a:extLst>
+                  <a:ext uri="{0D108BD9-81ED-4DB2-BD59-A6C34878D82A}">
+                    <a16:rowId xmlns:a16="http://schemas.microsoft.com/office/drawing/2014/main" val="3923419071"/>
                   </a:ext>
                 </a:extLst>
               </a:tr>
@@ -36527,6 +37255,155 @@
           </a:graphicData>
         </a:graphic>
       </p:graphicFrame>
+      <p:sp>
+        <p:nvSpPr>
+          <p:cNvPr id="7" name="TextBox 6">
+            <a:extLst>
+              <a:ext uri="{FF2B5EF4-FFF2-40B4-BE49-F238E27FC236}">
+                <a16:creationId xmlns:a16="http://schemas.microsoft.com/office/drawing/2014/main" id="{645F0D73-93A0-4946-B4BA-3EEAA4935A8D}"/>
+              </a:ext>
+            </a:extLst>
+          </p:cNvPr>
+          <p:cNvSpPr txBox="1"/>
+          <p:nvPr/>
+        </p:nvSpPr>
+        <p:spPr>
+          <a:xfrm>
+            <a:off x="1516582" y="3222751"/>
+            <a:ext cx="9158835" cy="292388"/>
+          </a:xfrm>
+          <a:prstGeom prst="rect">
+            <a:avLst/>
+          </a:prstGeom>
+          <a:noFill/>
+        </p:spPr>
+        <p:txBody>
+          <a:bodyPr wrap="square">
+            <a:spAutoFit/>
+          </a:bodyPr>
+          <a:lstStyle/>
+          <a:p>
+            <a:pPr algn="l"/>
+            <a:r>
+              <a:rPr sz="1300" b="1" i="0" dirty="0">
+                <a:solidFill>
+                  <a:srgbClr val="2E75B6"/>
+                </a:solidFill>
+              </a:rPr>
+              <a:t>AEC </a:t>
+            </a:r>
+            <a:r>
+              <a:rPr sz="1300" b="1" i="0" dirty="0" err="1">
+                <a:solidFill>
+                  <a:srgbClr val="2E75B6"/>
+                </a:solidFill>
+              </a:rPr>
+              <a:t>추가</a:t>
+            </a:r>
+            <a:r>
+              <a:rPr sz="1300" b="1" i="0" dirty="0">
+                <a:solidFill>
+                  <a:srgbClr val="2E75B6"/>
+                </a:solidFill>
+              </a:rPr>
+              <a:t>(Case1→2)로 AUC +15.2% </a:t>
+            </a:r>
+            <a:r>
+              <a:rPr sz="1300" b="1" i="0" dirty="0" err="1">
+                <a:solidFill>
+                  <a:srgbClr val="2E75B6"/>
+                </a:solidFill>
+              </a:rPr>
+              <a:t>향상</a:t>
+            </a:r>
+            <a:r>
+              <a:rPr sz="1300" b="1" i="0" dirty="0">
+                <a:solidFill>
+                  <a:srgbClr val="2E75B6"/>
+                </a:solidFill>
+              </a:rPr>
+              <a:t>  |  CT </a:t>
+            </a:r>
+            <a:r>
+              <a:rPr sz="1300" b="1" i="0" dirty="0" err="1">
+                <a:solidFill>
+                  <a:srgbClr val="2E75B6"/>
+                </a:solidFill>
+              </a:rPr>
+              <a:t>모델명</a:t>
+            </a:r>
+            <a:r>
+              <a:rPr sz="1300" b="1" i="0" dirty="0">
+                <a:solidFill>
+                  <a:srgbClr val="2E75B6"/>
+                </a:solidFill>
+              </a:rPr>
+              <a:t>/</a:t>
+            </a:r>
+            <a:r>
+              <a:rPr sz="1300" b="1" i="0" dirty="0" err="1">
+                <a:solidFill>
+                  <a:srgbClr val="2E75B6"/>
+                </a:solidFill>
+              </a:rPr>
+              <a:t>kVp</a:t>
+            </a:r>
+            <a:r>
+              <a:rPr sz="1300" b="1" i="0" dirty="0">
+                <a:solidFill>
+                  <a:srgbClr val="2E75B6"/>
+                </a:solidFill>
+              </a:rPr>
+              <a:t> </a:t>
+            </a:r>
+            <a:r>
+              <a:rPr sz="1300" b="1" i="0" dirty="0" err="1">
+                <a:solidFill>
+                  <a:srgbClr val="2E75B6"/>
+                </a:solidFill>
+              </a:rPr>
+              <a:t>추가</a:t>
+            </a:r>
+            <a:r>
+              <a:rPr sz="1300" b="1" i="0" dirty="0">
+                <a:solidFill>
+                  <a:srgbClr val="2E75B6"/>
+                </a:solidFill>
+              </a:rPr>
+              <a:t>(Case2→3)로 +4.9% </a:t>
+            </a:r>
+            <a:r>
+              <a:rPr sz="1300" b="1" i="0" dirty="0" err="1">
+                <a:solidFill>
+                  <a:srgbClr val="2E75B6"/>
+                </a:solidFill>
+              </a:rPr>
+              <a:t>추가</a:t>
+            </a:r>
+            <a:r>
+              <a:rPr sz="1300" b="1" i="0" dirty="0">
+                <a:solidFill>
+                  <a:srgbClr val="2E75B6"/>
+                </a:solidFill>
+              </a:rPr>
+              <a:t> </a:t>
+            </a:r>
+            <a:r>
+              <a:rPr sz="1300" b="1" i="0" dirty="0" err="1">
+                <a:solidFill>
+                  <a:srgbClr val="2E75B6"/>
+                </a:solidFill>
+              </a:rPr>
+              <a:t>개선</a:t>
+            </a:r>
+            <a:endParaRPr sz="1300" b="1" i="0" dirty="0">
+              <a:solidFill>
+                <a:srgbClr val="2E75B6"/>
+              </a:solidFill>
+            </a:endParaRPr>
+          </a:p>
+        </p:txBody>
+      </p:sp>
     </p:spTree>
     <p:extLst>
       <p:ext uri="{BB962C8B-B14F-4D97-AF65-F5344CB8AC3E}">
@@ -38178,7 +39055,7 @@
         </p:blipFill>
         <p:spPr>
           <a:xfrm>
-            <a:off x="3352799" y="3434600"/>
+            <a:off x="3352799" y="3612403"/>
             <a:ext cx="5486400" cy="2788267"/>
           </a:xfrm>
           <a:prstGeom prst="rect">
@@ -38298,14 +39175,14 @@
           <p:nvPr>
             <p:extLst>
               <p:ext uri="{D42A27DB-BD31-4B8C-83A1-F6EECF244321}">
-                <p14:modId xmlns:p14="http://schemas.microsoft.com/office/powerpoint/2010/main" val="1462275750"/>
+                <p14:modId xmlns:p14="http://schemas.microsoft.com/office/powerpoint/2010/main" val="4092277592"/>
               </p:ext>
             </p:extLst>
           </p:nvPr>
         </p:nvGraphicFramePr>
         <p:xfrm>
           <a:off x="1516582" y="1625599"/>
-          <a:ext cx="9158835" cy="1304544"/>
+          <a:ext cx="9158835" cy="1597152"/>
         </p:xfrm>
         <a:graphic>
           <a:graphicData uri="http://schemas.openxmlformats.org/drawingml/2006/table">
@@ -38964,7 +39841,7 @@
                     <a:p>
                       <a:pPr algn="ctr"/>
                       <a:r>
-                        <a:rPr sz="1200">
+                        <a:rPr sz="1200" dirty="0">
                           <a:solidFill>
                             <a:srgbClr val="1A1A2E"/>
                           </a:solidFill>
@@ -39114,6 +39991,209 @@
                 <a:extLst>
                   <a:ext uri="{0D108BD9-81ED-4DB2-BD59-A6C34878D82A}">
                     <a16:rowId xmlns:a16="http://schemas.microsoft.com/office/drawing/2014/main" val="10003"/>
+                  </a:ext>
+                </a:extLst>
+              </a:tr>
+              <a:tr h="292608">
+                <a:tc>
+                  <a:txBody>
+                    <a:bodyPr/>
+                    <a:lstStyle/>
+                    <a:p>
+                      <a:pPr algn="ctr"/>
+                      <a:r>
+                        <a:rPr sz="1200" dirty="0">
+                          <a:solidFill>
+                            <a:srgbClr val="1A1A2E"/>
+                          </a:solidFill>
+                        </a:rPr>
+                        <a:t>HL p-value</a:t>
+                      </a:r>
+                    </a:p>
+                  </a:txBody>
+                  <a:tcPr anchor="ctr">
+                    <a:solidFill>
+                      <a:srgbClr val="FFFFFF"/>
+                    </a:solidFill>
+                  </a:tcPr>
+                </a:tc>
+                <a:tc>
+                  <a:txBody>
+                    <a:bodyPr/>
+                    <a:lstStyle/>
+                    <a:p>
+                      <a:pPr algn="ctr"/>
+                      <a:r>
+                        <a:rPr sz="1200" dirty="0">
+                          <a:solidFill>
+                            <a:srgbClr val="1A1A2E"/>
+                          </a:solidFill>
+                        </a:rPr>
+                        <a:t>0.330</a:t>
+                      </a:r>
+                    </a:p>
+                  </a:txBody>
+                  <a:tcPr anchor="ctr">
+                    <a:solidFill>
+                      <a:srgbClr val="FFFFFF"/>
+                    </a:solidFill>
+                  </a:tcPr>
+                </a:tc>
+                <a:tc>
+                  <a:txBody>
+                    <a:bodyPr/>
+                    <a:lstStyle/>
+                    <a:p>
+                      <a:pPr algn="ctr"/>
+                      <a:r>
+                        <a:rPr sz="1200">
+                          <a:solidFill>
+                            <a:srgbClr val="1A1A2E"/>
+                          </a:solidFill>
+                        </a:rPr>
+                        <a:t>6.23e-04</a:t>
+                      </a:r>
+                    </a:p>
+                  </a:txBody>
+                  <a:tcPr anchor="ctr">
+                    <a:solidFill>
+                      <a:srgbClr val="FFFFFF"/>
+                    </a:solidFill>
+                  </a:tcPr>
+                </a:tc>
+                <a:tc>
+                  <a:txBody>
+                    <a:bodyPr/>
+                    <a:lstStyle/>
+                    <a:p>
+                      <a:pPr algn="ctr"/>
+                      <a:r>
+                        <a:rPr sz="1200" dirty="0">
+                          <a:solidFill>
+                            <a:srgbClr val="1A1A2E"/>
+                          </a:solidFill>
+                        </a:rPr>
+                        <a:t>0.168</a:t>
+                      </a:r>
+                    </a:p>
+                  </a:txBody>
+                  <a:tcPr anchor="ctr">
+                    <a:solidFill>
+                      <a:srgbClr val="FFFFFF"/>
+                    </a:solidFill>
+                  </a:tcPr>
+                </a:tc>
+                <a:tc>
+                  <a:txBody>
+                    <a:bodyPr/>
+                    <a:lstStyle/>
+                    <a:p>
+                      <a:pPr algn="ctr"/>
+                      <a:r>
+                        <a:rPr sz="1200" dirty="0">
+                          <a:solidFill>
+                            <a:srgbClr val="1A1A2E"/>
+                          </a:solidFill>
+                        </a:rPr>
+                        <a:t>0.189</a:t>
+                      </a:r>
+                    </a:p>
+                  </a:txBody>
+                  <a:tcPr anchor="ctr">
+                    <a:solidFill>
+                      <a:srgbClr val="FFFFFF"/>
+                    </a:solidFill>
+                  </a:tcPr>
+                </a:tc>
+                <a:tc>
+                  <a:txBody>
+                    <a:bodyPr/>
+                    <a:lstStyle/>
+                    <a:p>
+                      <a:pPr algn="ctr"/>
+                      <a:r>
+                        <a:rPr sz="1200" dirty="0" err="1">
+                          <a:solidFill>
+                            <a:srgbClr val="1A1A2E"/>
+                          </a:solidFill>
+                        </a:rPr>
+                        <a:t>보정도</a:t>
+                      </a:r>
+                      <a:r>
+                        <a:rPr sz="1200" dirty="0">
+                          <a:solidFill>
+                            <a:srgbClr val="1A1A2E"/>
+                          </a:solidFill>
+                        </a:rPr>
+                        <a:t> </a:t>
+                      </a:r>
+                      <a:r>
+                        <a:rPr sz="1200" dirty="0" err="1">
+                          <a:solidFill>
+                            <a:srgbClr val="1A1A2E"/>
+                          </a:solidFill>
+                        </a:rPr>
+                        <a:t>개선</a:t>
+                      </a:r>
+                      <a:endParaRPr sz="1200" dirty="0">
+                        <a:solidFill>
+                          <a:srgbClr val="1A1A2E"/>
+                        </a:solidFill>
+                      </a:endParaRPr>
+                    </a:p>
+                  </a:txBody>
+                  <a:tcPr anchor="ctr">
+                    <a:solidFill>
+                      <a:srgbClr val="FFFFFF"/>
+                    </a:solidFill>
+                  </a:tcPr>
+                </a:tc>
+                <a:tc>
+                  <a:txBody>
+                    <a:bodyPr/>
+                    <a:lstStyle/>
+                    <a:p>
+                      <a:pPr algn="ctr"/>
+                      <a:r>
+                        <a:rPr sz="1200" dirty="0" err="1">
+                          <a:solidFill>
+                            <a:srgbClr val="1A1A2E"/>
+                          </a:solidFill>
+                        </a:rPr>
+                        <a:t>보정도</a:t>
+                      </a:r>
+                      <a:r>
+                        <a:rPr sz="1200" dirty="0">
+                          <a:solidFill>
+                            <a:srgbClr val="1A1A2E"/>
+                          </a:solidFill>
+                        </a:rPr>
+                        <a:t> </a:t>
+                      </a:r>
+                      <a:r>
+                        <a:rPr sz="1200" dirty="0" err="1">
+                          <a:solidFill>
+                            <a:srgbClr val="1A1A2E"/>
+                          </a:solidFill>
+                        </a:rPr>
+                        <a:t>양호</a:t>
+                      </a:r>
+                      <a:endParaRPr sz="1200" dirty="0">
+                        <a:solidFill>
+                          <a:srgbClr val="1A1A2E"/>
+                        </a:solidFill>
+                      </a:endParaRPr>
+                    </a:p>
+                  </a:txBody>
+                  <a:tcPr anchor="ctr">
+                    <a:solidFill>
+                      <a:srgbClr val="FFFFFF"/>
+                    </a:solidFill>
+                  </a:tcPr>
+                </a:tc>
+                <a:extLst>
+                  <a:ext uri="{0D108BD9-81ED-4DB2-BD59-A6C34878D82A}">
+                    <a16:rowId xmlns:a16="http://schemas.microsoft.com/office/drawing/2014/main" val="2121627529"/>
                   </a:ext>
                 </a:extLst>
               </a:tr>
@@ -39121,6 +40201,155 @@
           </a:graphicData>
         </a:graphic>
       </p:graphicFrame>
+      <p:sp>
+        <p:nvSpPr>
+          <p:cNvPr id="9" name="TextBox 8">
+            <a:extLst>
+              <a:ext uri="{FF2B5EF4-FFF2-40B4-BE49-F238E27FC236}">
+                <a16:creationId xmlns:a16="http://schemas.microsoft.com/office/drawing/2014/main" id="{CF3D8027-4E7E-4FA6-8079-6AD17C2111C2}"/>
+              </a:ext>
+            </a:extLst>
+          </p:cNvPr>
+          <p:cNvSpPr txBox="1"/>
+          <p:nvPr/>
+        </p:nvSpPr>
+        <p:spPr>
+          <a:xfrm>
+            <a:off x="1516582" y="3222751"/>
+            <a:ext cx="9158835" cy="292388"/>
+          </a:xfrm>
+          <a:prstGeom prst="rect">
+            <a:avLst/>
+          </a:prstGeom>
+          <a:noFill/>
+        </p:spPr>
+        <p:txBody>
+          <a:bodyPr wrap="square">
+            <a:spAutoFit/>
+          </a:bodyPr>
+          <a:lstStyle/>
+          <a:p>
+            <a:pPr algn="l"/>
+            <a:r>
+              <a:rPr sz="1300" b="1" i="0" dirty="0">
+                <a:solidFill>
+                  <a:srgbClr val="2E75B6"/>
+                </a:solidFill>
+              </a:rPr>
+              <a:t>AEC </a:t>
+            </a:r>
+            <a:r>
+              <a:rPr sz="1300" b="1" i="0" dirty="0" err="1">
+                <a:solidFill>
+                  <a:srgbClr val="2E75B6"/>
+                </a:solidFill>
+              </a:rPr>
+              <a:t>추가</a:t>
+            </a:r>
+            <a:r>
+              <a:rPr sz="1300" b="1" i="0" dirty="0">
+                <a:solidFill>
+                  <a:srgbClr val="2E75B6"/>
+                </a:solidFill>
+              </a:rPr>
+              <a:t>(Case1→2)로 AUC +6.6% </a:t>
+            </a:r>
+            <a:r>
+              <a:rPr sz="1300" b="1" i="0" dirty="0" err="1">
+                <a:solidFill>
+                  <a:srgbClr val="2E75B6"/>
+                </a:solidFill>
+              </a:rPr>
+              <a:t>향상</a:t>
+            </a:r>
+            <a:r>
+              <a:rPr sz="1300" b="1" i="0" dirty="0">
+                <a:solidFill>
+                  <a:srgbClr val="2E75B6"/>
+                </a:solidFill>
+              </a:rPr>
+              <a:t>  |  CT </a:t>
+            </a:r>
+            <a:r>
+              <a:rPr sz="1300" b="1" i="0" dirty="0" err="1">
+                <a:solidFill>
+                  <a:srgbClr val="2E75B6"/>
+                </a:solidFill>
+              </a:rPr>
+              <a:t>모델명</a:t>
+            </a:r>
+            <a:r>
+              <a:rPr sz="1300" b="1" i="0" dirty="0">
+                <a:solidFill>
+                  <a:srgbClr val="2E75B6"/>
+                </a:solidFill>
+              </a:rPr>
+              <a:t>/</a:t>
+            </a:r>
+            <a:r>
+              <a:rPr sz="1300" b="1" i="0" dirty="0" err="1">
+                <a:solidFill>
+                  <a:srgbClr val="2E75B6"/>
+                </a:solidFill>
+              </a:rPr>
+              <a:t>kVp</a:t>
+            </a:r>
+            <a:r>
+              <a:rPr sz="1300" b="1" i="0" dirty="0">
+                <a:solidFill>
+                  <a:srgbClr val="2E75B6"/>
+                </a:solidFill>
+              </a:rPr>
+              <a:t> </a:t>
+            </a:r>
+            <a:r>
+              <a:rPr sz="1300" b="1" i="0" dirty="0" err="1">
+                <a:solidFill>
+                  <a:srgbClr val="2E75B6"/>
+                </a:solidFill>
+              </a:rPr>
+              <a:t>추가</a:t>
+            </a:r>
+            <a:r>
+              <a:rPr sz="1300" b="1" i="0" dirty="0">
+                <a:solidFill>
+                  <a:srgbClr val="2E75B6"/>
+                </a:solidFill>
+              </a:rPr>
+              <a:t>(Case2→3)로 +12.1% </a:t>
+            </a:r>
+            <a:r>
+              <a:rPr sz="1300" b="1" i="0" dirty="0" err="1">
+                <a:solidFill>
+                  <a:srgbClr val="2E75B6"/>
+                </a:solidFill>
+              </a:rPr>
+              <a:t>추가</a:t>
+            </a:r>
+            <a:r>
+              <a:rPr sz="1300" b="1" i="0" dirty="0">
+                <a:solidFill>
+                  <a:srgbClr val="2E75B6"/>
+                </a:solidFill>
+              </a:rPr>
+              <a:t> </a:t>
+            </a:r>
+            <a:r>
+              <a:rPr sz="1300" b="1" i="0" dirty="0" err="1">
+                <a:solidFill>
+                  <a:srgbClr val="2E75B6"/>
+                </a:solidFill>
+              </a:rPr>
+              <a:t>개선</a:t>
+            </a:r>
+            <a:endParaRPr sz="1300" b="1" i="0" dirty="0">
+              <a:solidFill>
+                <a:srgbClr val="2E75B6"/>
+              </a:solidFill>
+            </a:endParaRPr>
+          </a:p>
+        </p:txBody>
+      </p:sp>
     </p:spTree>
     <p:extLst>
       <p:ext uri="{BB962C8B-B14F-4D97-AF65-F5344CB8AC3E}">

--- a/연구자료/260424_Linear_Logistic_Regression.pptx
+++ b/연구자료/260424_Linear_Logistic_Regression.pptx
@@ -41111,6 +41111,29 @@
             </a:r>
             <a:endParaRPr lang="en-US" altLang="ko-KR" dirty="0"/>
           </a:p>
+          <a:p>
+            <a:r>
+              <a:rPr lang="ko-KR" altLang="en-US" dirty="0"/>
+              <a:t>추후 </a:t>
+            </a:r>
+            <a:r>
+              <a:rPr lang="en-US" altLang="ko-KR" dirty="0"/>
+              <a:t>SMI(TAMA/Height</a:t>
+            </a:r>
+            <a:r>
+              <a:rPr lang="en-US" altLang="ko-KR" baseline="30000" dirty="0"/>
+              <a:t>2</a:t>
+            </a:r>
+            <a:r>
+              <a:rPr lang="en-US" altLang="ko-KR" dirty="0"/>
+              <a:t>)</a:t>
+            </a:r>
+            <a:r>
+              <a:rPr lang="ko-KR" altLang="en-US" dirty="0"/>
+              <a:t>도 활용 가능</a:t>
+            </a:r>
+            <a:endParaRPr lang="en-US" altLang="ko-KR" dirty="0"/>
+          </a:p>
         </p:txBody>
       </p:sp>
       <p:sp>
